--- a/答辩PPT/A24合同智能审核系统-答辩汇报.pptx
+++ b/答辩PPT/A24合同智能审核系统-答辩汇报.pptx
@@ -312,8 +312,48 @@
           <a:lstStyle/>
           <a:p>
             <a:r>
-              <a:t>各位评委老师好，我们是「海底汪汪队」。今天汇报的是我们为网新恒天命题开发的「基于大模型的企业合同智能审核与风险预警系统」——SmartContract Auditor。它是一个 AI 原生的合同审核平台，核心理念是「人机协同审核」：让大模型去做它擅长的语义理解，把最终的风险裁决交给可复现的确定性规则，帮助法务在几分钟内完成原本需要几小时的逐条审核。</a:t>
-            </a:r>
+              <a:rPr lang="en-US" altLang="zh-CN"/>
+              <a:t>【</a:t>
+            </a:r>
+            <a:r>
+              <a:rPr lang="zh-CN" altLang="en-US"/>
+              <a:t>建议 </a:t>
+            </a:r>
+            <a:r>
+              <a:rPr lang="en-US" altLang="zh-CN"/>
+              <a:t>40 </a:t>
+            </a:r>
+            <a:r>
+              <a:rPr lang="zh-CN" altLang="en-US"/>
+              <a:t>秒</a:t>
+            </a:r>
+            <a:r>
+              <a:rPr lang="en-US" altLang="zh-CN"/>
+              <a:t>】</a:t>
+            </a:r>
+          </a:p>
+          <a:p>
+            <a:r>
+              <a:rPr lang="zh-CN" altLang="en-US"/>
+              <a:t>各位评委老师好，我们是「海底喵喵队」。今天汇报的是我们为网新恒天命题开发的「基于大模型的企业合同智能审核与风险预警系统」</a:t>
+            </a:r>
+            <a:r>
+              <a:rPr lang="en-US" altLang="zh-CN"/>
+              <a:t>——SmartContract Auditor</a:t>
+            </a:r>
+            <a:r>
+              <a:rPr lang="zh-CN" altLang="en-US"/>
+              <a:t>。它是一个 </a:t>
+            </a:r>
+            <a:r>
+              <a:rPr lang="en-US" altLang="zh-CN"/>
+              <a:t>AI </a:t>
+            </a:r>
+            <a:r>
+              <a:rPr lang="zh-CN" altLang="en-US"/>
+              <a:t>原生的合同审核平台，核心理念是「人机协同审核」：让大模型去做它擅长的语义理解，把最终的风险裁决交给可复现的确定性规则，帮助法务在几分钟内完成原本需要几小时的逐条审核。</a:t>
+            </a:r>
+            <a:endParaRPr/>
           </a:p>
         </p:txBody>
       </p:sp>
@@ -382,8 +422,104 @@
           <a:lstStyle/>
           <a:p>
             <a:r>
-              <a:t>方案二是证据驱动的确定性风险识别，覆盖 13 类风险。分三层：第一层规则召回，用确定性正则先扫一遍，是 fast 基线和 precise 的兜底；第二层证据裁决，LLM 抽取事实、代码按硬阈值裁决；第三层建议层，按法条编号精确取条文再生成修改建议，并做 grounding 校验。这 13 类风险是专门面向 IT 服务和金融科技行业设计的，比如 SLA 罚则、数据导出销毁、IP 归属、源代码托管义务，直接匹配网新恒天的业务场景。每一条风险都能追溯到「抽了什么事实、按哪条阈值裁决、依据哪条法条、怎么改」。</a:t>
-            </a:r>
+              <a:rPr lang="en-US" altLang="zh-CN"/>
+              <a:t>【</a:t>
+            </a:r>
+            <a:r>
+              <a:rPr lang="zh-CN" altLang="en-US"/>
+              <a:t>建议 </a:t>
+            </a:r>
+            <a:r>
+              <a:rPr lang="en-US" altLang="zh-CN"/>
+              <a:t>55 </a:t>
+            </a:r>
+            <a:r>
+              <a:rPr lang="zh-CN" altLang="en-US"/>
+              <a:t>秒</a:t>
+            </a:r>
+            <a:r>
+              <a:rPr lang="en-US" altLang="zh-CN"/>
+              <a:t>】</a:t>
+            </a:r>
+          </a:p>
+          <a:p>
+            <a:r>
+              <a:rPr lang="zh-CN" altLang="en-US"/>
+              <a:t>方案二是证据驱动的确定性风险识别，覆盖 </a:t>
+            </a:r>
+            <a:r>
+              <a:rPr lang="en-US" altLang="zh-CN"/>
+              <a:t>13 </a:t>
+            </a:r>
+            <a:r>
+              <a:rPr lang="zh-CN" altLang="en-US"/>
+              <a:t>类风险。分三层：第一层规则召回，用确定性正则先扫一遍，是 </a:t>
+            </a:r>
+            <a:r>
+              <a:rPr lang="en-US" altLang="zh-CN"/>
+              <a:t>fast </a:t>
+            </a:r>
+            <a:r>
+              <a:rPr lang="zh-CN" altLang="en-US"/>
+              <a:t>基线和 </a:t>
+            </a:r>
+            <a:r>
+              <a:rPr lang="en-US" altLang="zh-CN"/>
+              <a:t>precise </a:t>
+            </a:r>
+            <a:r>
+              <a:rPr lang="zh-CN" altLang="en-US"/>
+              <a:t>的兜底；第二层证据裁决，</a:t>
+            </a:r>
+            <a:r>
+              <a:rPr lang="en-US" altLang="zh-CN"/>
+              <a:t>LLM </a:t>
+            </a:r>
+            <a:r>
+              <a:rPr lang="zh-CN" altLang="en-US"/>
+              <a:t>抽取事实、代码按硬阈值裁决；第三层建议层，按法条编号精确取条文再生成修改建议，并做 </a:t>
+            </a:r>
+            <a:r>
+              <a:rPr lang="en-US" altLang="zh-CN"/>
+              <a:t>grounding </a:t>
+            </a:r>
+            <a:r>
+              <a:rPr lang="zh-CN" altLang="en-US"/>
+              <a:t>校验。这 </a:t>
+            </a:r>
+            <a:r>
+              <a:rPr lang="en-US" altLang="zh-CN"/>
+              <a:t>13 </a:t>
+            </a:r>
+            <a:r>
+              <a:rPr lang="zh-CN" altLang="en-US"/>
+              <a:t>类风险是专门面向 </a:t>
+            </a:r>
+            <a:r>
+              <a:rPr lang="en-US" altLang="zh-CN"/>
+              <a:t>IT </a:t>
+            </a:r>
+            <a:r>
+              <a:rPr lang="zh-CN" altLang="en-US"/>
+              <a:t>服务和金融科技行业设计的，比如 </a:t>
+            </a:r>
+            <a:r>
+              <a:rPr lang="en-US" altLang="zh-CN"/>
+              <a:t>SLA </a:t>
+            </a:r>
+            <a:r>
+              <a:rPr lang="zh-CN" altLang="en-US"/>
+              <a:t>罚则、数据导出销毁、</a:t>
+            </a:r>
+            <a:r>
+              <a:rPr lang="en-US" altLang="zh-CN"/>
+              <a:t>IP </a:t>
+            </a:r>
+            <a:r>
+              <a:rPr lang="zh-CN" altLang="en-US"/>
+              <a:t>归属、源代码托管义务，直接匹配网新恒天的业务场景。每一条风险都能追溯到「抽了什么事实、按哪条阈值裁决、依据哪条法条、怎么改」。</a:t>
+            </a:r>
+            <a:endParaRPr/>
           </a:p>
         </p:txBody>
       </p:sp>
@@ -452,8 +588,56 @@
           <a:lstStyle/>
           <a:p>
             <a:r>
-              <a:t>方案三是标准条款比对与缺失检测。传统的关键词匹配无法应对条款标题表述各异、顺序重排、内容拆分合并的问题。我们采用三步：先按合同类型做结构化过滤，再让 LLM 逐条判定覆盖、部分覆盖还是缺失，最后用图分析检测跨条款联动风险。这里有两个典型例子：前置依赖——如果缺失了验收标准条款，下游付款条款的验收节点就会失效；互斥冲突——争议解决约定北京仲裁、管辖条款却约定杭州法院，两者同时存在就报警。对缺失条款，我们不仅提示缺了什么，还直接给出可用的补全文本。</a:t>
-            </a:r>
+              <a:rPr lang="en-US" altLang="zh-CN"/>
+              <a:t>【</a:t>
+            </a:r>
+            <a:r>
+              <a:rPr lang="zh-CN" altLang="en-US"/>
+              <a:t>建议 </a:t>
+            </a:r>
+            <a:r>
+              <a:rPr lang="en-US" altLang="zh-CN"/>
+              <a:t>45 </a:t>
+            </a:r>
+            <a:r>
+              <a:rPr lang="zh-CN" altLang="en-US"/>
+              <a:t>秒</a:t>
+            </a:r>
+            <a:r>
+              <a:rPr lang="en-US" altLang="zh-CN"/>
+              <a:t>】</a:t>
+            </a:r>
+          </a:p>
+          <a:p>
+            <a:r>
+              <a:rPr lang="zh-CN" altLang="en-US"/>
+              <a:t>方案三是标准条款比对与缺失检测。传统的关键词匹配无法应对条款标题表述各异、顺序重排、内容拆分合并的问题。我们采用三步：先按合同类型做结构化过滤，再让 </a:t>
+            </a:r>
+            <a:r>
+              <a:rPr lang="en-US" altLang="zh-CN"/>
+              <a:t>LLM </a:t>
+            </a:r>
+            <a:r>
+              <a:rPr lang="zh-CN" altLang="en-US"/>
+              <a:t>逐条判定覆盖、部分覆盖还是缺失，最后用图分析检测跨条款联动风险。这里有两个典型例子：前置依赖</a:t>
+            </a:r>
+            <a:r>
+              <a:rPr lang="en-US" altLang="zh-CN"/>
+              <a:t>——</a:t>
+            </a:r>
+            <a:r>
+              <a:rPr lang="zh-CN" altLang="en-US"/>
+              <a:t>如果缺失了验收标准条款，下游付款条款的验收节点就会失效；互斥冲突</a:t>
+            </a:r>
+            <a:r>
+              <a:rPr lang="en-US" altLang="zh-CN"/>
+              <a:t>——</a:t>
+            </a:r>
+            <a:r>
+              <a:rPr lang="zh-CN" altLang="en-US"/>
+              <a:t>争议解决约定北京仲裁、管辖条款却约定杭州法院，两者同时存在就报警。对缺失条款，我们不仅提示缺了什么，还直接给出可用的补全文本。</a:t>
+            </a:r>
+            <a:endParaRPr/>
           </a:p>
         </p:txBody>
       </p:sp>
@@ -522,8 +706,104 @@
           <a:lstStyle/>
           <a:p>
             <a:r>
-              <a:t>方案四是反馈闭环和报告生成。法务可以对每条 AI 标注做三种操作：确认正确、标记错误、手动补充，反馈以结构化形式存储，积累到一定量后导出用于模型迭代。这里有个重要的设计取舍——法律审核要求结果稳定可追溯，所以反馈不即时改变结论，而是版本化沉淀、支持回滚，避免过度承诺实时自适应。报告侧输出四大区块：基本信息、风险评估总览、风险条款逐项分析、条款完整性检查，其中风险热力图把每一页的风险密度映射成颜色，这是我们区别于命令行和纯文本输出的核心体验优势。</a:t>
-            </a:r>
+              <a:rPr lang="en-US" altLang="zh-CN"/>
+              <a:t>【</a:t>
+            </a:r>
+            <a:r>
+              <a:rPr lang="zh-CN" altLang="en-US"/>
+              <a:t>建议 </a:t>
+            </a:r>
+            <a:r>
+              <a:rPr lang="en-US" altLang="zh-CN"/>
+              <a:t>45 </a:t>
+            </a:r>
+            <a:r>
+              <a:rPr lang="zh-CN" altLang="en-US"/>
+              <a:t>秒</a:t>
+            </a:r>
+            <a:r>
+              <a:rPr lang="en-US" altLang="zh-CN"/>
+              <a:t>】</a:t>
+            </a:r>
+          </a:p>
+          <a:p>
+            <a:r>
+              <a:rPr lang="zh-CN" altLang="en-US"/>
+              <a:t>方案四是反馈闭环和报告生成。法务可以对每条 </a:t>
+            </a:r>
+            <a:r>
+              <a:rPr lang="en-US" altLang="zh-CN"/>
+              <a:t>AI </a:t>
+            </a:r>
+            <a:r>
+              <a:rPr lang="zh-CN" altLang="en-US"/>
+              <a:t>标注做三种操作：确认正确、标记错误、手动补充，反馈先以 </a:t>
+            </a:r>
+            <a:r>
+              <a:rPr lang="en-US" altLang="zh-CN"/>
+              <a:t>pending </a:t>
+            </a:r>
+            <a:r>
+              <a:rPr lang="zh-CN" altLang="en-US"/>
+              <a:t>状态留痕在 </a:t>
+            </a:r>
+            <a:r>
+              <a:rPr lang="en-US" altLang="zh-CN"/>
+              <a:t>feedback_logs</a:t>
+            </a:r>
+            <a:r>
+              <a:rPr lang="zh-CN" altLang="en-US"/>
+              <a:t>，经 </a:t>
+            </a:r>
+            <a:r>
+              <a:rPr lang="en-US" altLang="zh-CN"/>
+              <a:t>reviewer </a:t>
+            </a:r>
+            <a:r>
+              <a:rPr lang="zh-CN" altLang="en-US"/>
+              <a:t>审核、</a:t>
+            </a:r>
+            <a:r>
+              <a:rPr lang="en-US" altLang="zh-CN"/>
+              <a:t>admin </a:t>
+            </a:r>
+            <a:r>
+              <a:rPr lang="zh-CN" altLang="en-US"/>
+              <a:t>批准后才沉淀为 </a:t>
+            </a:r>
+            <a:r>
+              <a:rPr lang="en-US" altLang="zh-CN"/>
+              <a:t>feedback_experiences </a:t>
+            </a:r>
+            <a:r>
+              <a:rPr lang="zh-CN" altLang="en-US"/>
+              <a:t>风险经验，进入独立向量库供后续审核检索参考</a:t>
+            </a:r>
+            <a:r>
+              <a:rPr lang="en-US" altLang="zh-CN"/>
+              <a:t>——</a:t>
+            </a:r>
+            <a:r>
+              <a:rPr lang="zh-CN" altLang="en-US"/>
+              <a:t>这不是模型微调，而且该能力默认关闭、当前正式库中反馈数据为 </a:t>
+            </a:r>
+            <a:r>
+              <a:rPr lang="en-US" altLang="zh-CN"/>
+              <a:t>0 </a:t>
+            </a:r>
+            <a:r>
+              <a:rPr lang="zh-CN" altLang="en-US"/>
+              <a:t>条。这里有个重要的设计取舍</a:t>
+            </a:r>
+            <a:r>
+              <a:rPr lang="en-US" altLang="zh-CN"/>
+              <a:t>——</a:t>
+            </a:r>
+            <a:r>
+              <a:rPr lang="zh-CN" altLang="en-US"/>
+              <a:t>法律审核要求结果稳定可追溯，所以反馈不即时改变结论，而是版本化沉淀、支持回滚，避免过度承诺实时自适应。报告侧输出四大区块：基本信息、风险评估总览、风险条款逐项分析、条款完整性检查，其中风险热力图把每一页的风险密度映射成颜色，这是我们区别于命令行和纯文本输出的核心体验优势。</a:t>
+            </a:r>
+            <a:endParaRPr/>
           </a:p>
         </p:txBody>
       </p:sp>
@@ -592,8 +872,56 @@
           <a:lstStyle/>
           <a:p>
             <a:r>
-              <a:t>在产品体验上，我们做了「看到风险、一键跳转、理解判断」三步闭环。上传合同后约 30 秒出风险热力图，红色区域一眼就能看到风险集中在哪几页；点击任意一条审核结果，右侧原文面板自动滚动到对应条款并高亮；每一条风险都附带完整的证据链、裁决依据、法条和修改建议，AI 的判断逻辑完全可追溯。这里我放两张截图——左边是报告页的风险热力图，右边是审核结果详情页的原文高亮定位。</a:t>
-            </a:r>
+              <a:rPr lang="en-US" altLang="zh-CN"/>
+              <a:t>【</a:t>
+            </a:r>
+            <a:r>
+              <a:rPr lang="zh-CN" altLang="en-US"/>
+              <a:t>建议 </a:t>
+            </a:r>
+            <a:r>
+              <a:rPr lang="en-US" altLang="zh-CN"/>
+              <a:t>45 </a:t>
+            </a:r>
+            <a:r>
+              <a:rPr lang="zh-CN" altLang="en-US"/>
+              <a:t>秒</a:t>
+            </a:r>
+            <a:r>
+              <a:rPr lang="en-US" altLang="zh-CN"/>
+              <a:t>】</a:t>
+            </a:r>
+          </a:p>
+          <a:p>
+            <a:r>
+              <a:rPr lang="zh-CN" altLang="en-US"/>
+              <a:t>在产品体验上，我们做了「看到风险、一键跳转、理解判断」三步闭环。上传合同后约 </a:t>
+            </a:r>
+            <a:r>
+              <a:rPr lang="en-US" altLang="zh-CN"/>
+              <a:t>30 </a:t>
+            </a:r>
+            <a:r>
+              <a:rPr lang="zh-CN" altLang="en-US"/>
+              <a:t>秒出风险热力图，红色区域一眼就能看到风险集中在哪几页；点击任意一条审核结果，右侧原文面板自动滚动到对应条款并高亮；每一条风险都附带完整的证据链、裁决依据、法条和修改建议，</a:t>
+            </a:r>
+            <a:r>
+              <a:rPr lang="en-US" altLang="zh-CN"/>
+              <a:t>AI </a:t>
+            </a:r>
+            <a:r>
+              <a:rPr lang="zh-CN" altLang="en-US"/>
+              <a:t>的判断逻辑完全可追溯。这里我放两张截图</a:t>
+            </a:r>
+            <a:r>
+              <a:rPr lang="en-US" altLang="zh-CN"/>
+              <a:t>——</a:t>
+            </a:r>
+            <a:r>
+              <a:rPr lang="zh-CN" altLang="en-US"/>
+              <a:t>左边是报告页的风险热力图，右边是审核结果详情页的原文高亮定位。</a:t>
+            </a:r>
+            <a:endParaRPr/>
           </a:p>
         </p:txBody>
       </p:sp>
@@ -662,8 +990,136 @@
           <a:lstStyle/>
           <a:p>
             <a:r>
-              <a:t>在创新亮点上，赛题第 7 节明确鼓励三个方向，我们全部落地。多轮对话式合同修改采用 RCBSF 多智能体，Leader 生成草案、Follower 从法务角度审校；知识图谱跨条款关联分析用 depends_on 和 conflict_with 图论字段检测联动风险；印章签名区域定位集成了 PaddleOCR。同时我们参考了多篇前沿论文，关键思想逐一落地——Self-Consistency 的多数投票、KATE 的 kNN 检索少样本、Lost-in-the-Middle 的首尾块处理、RAG 的可溯源 grounding 等，未落地的如实标注，不夸大。</a:t>
-            </a:r>
+              <a:rPr lang="en-US" altLang="zh-CN"/>
+              <a:t>【</a:t>
+            </a:r>
+            <a:r>
+              <a:rPr lang="zh-CN" altLang="en-US"/>
+              <a:t>建议 </a:t>
+            </a:r>
+            <a:r>
+              <a:rPr lang="en-US" altLang="zh-CN"/>
+              <a:t>45 </a:t>
+            </a:r>
+            <a:r>
+              <a:rPr lang="zh-CN" altLang="en-US"/>
+              <a:t>秒</a:t>
+            </a:r>
+            <a:r>
+              <a:rPr lang="en-US" altLang="zh-CN"/>
+              <a:t>】</a:t>
+            </a:r>
+          </a:p>
+          <a:p>
+            <a:r>
+              <a:rPr lang="zh-CN" altLang="en-US"/>
+              <a:t>在创新亮点上，赛题第 </a:t>
+            </a:r>
+            <a:r>
+              <a:rPr lang="en-US" altLang="zh-CN"/>
+              <a:t>7 </a:t>
+            </a:r>
+            <a:r>
+              <a:rPr lang="zh-CN" altLang="en-US"/>
+              <a:t>节明确鼓励三个方向，我们全部落地。多轮对话式合同修改采用 </a:t>
+            </a:r>
+            <a:r>
+              <a:rPr lang="en-US" altLang="zh-CN"/>
+              <a:t>Leader–Follower </a:t>
+            </a:r>
+            <a:r>
+              <a:rPr lang="zh-CN" altLang="en-US"/>
+              <a:t>修订流程：</a:t>
+            </a:r>
+            <a:r>
+              <a:rPr lang="en-US" altLang="zh-CN"/>
+              <a:t>Leader </a:t>
+            </a:r>
+            <a:r>
+              <a:rPr lang="zh-CN" altLang="en-US"/>
+              <a:t>生成草案、</a:t>
+            </a:r>
+            <a:r>
+              <a:rPr lang="en-US" altLang="zh-CN"/>
+              <a:t>Follower </a:t>
+            </a:r>
+            <a:r>
+              <a:rPr lang="zh-CN" altLang="en-US"/>
+              <a:t>从法务角度审校，位置由用户确认、采用态由用户点击；知识图谱跨条款关联分析用 </a:t>
+            </a:r>
+            <a:r>
+              <a:rPr lang="en-US" altLang="zh-CN"/>
+              <a:t>depends_on </a:t>
+            </a:r>
+            <a:r>
+              <a:rPr lang="zh-CN" altLang="en-US"/>
+              <a:t>和 </a:t>
+            </a:r>
+            <a:r>
+              <a:rPr lang="en-US" altLang="zh-CN"/>
+              <a:t>conflict_with </a:t>
+            </a:r>
+            <a:r>
+              <a:rPr lang="zh-CN" altLang="en-US"/>
+              <a:t>图论字段检测联动风险；印章签名区域定位集成了 </a:t>
+            </a:r>
+            <a:r>
+              <a:rPr lang="en-US" altLang="zh-CN"/>
+              <a:t>PaddleOCR</a:t>
+            </a:r>
+            <a:r>
+              <a:rPr lang="zh-CN" altLang="en-US"/>
+              <a:t>。同时我们参考了多篇前沿论文，关键思想逐一落地</a:t>
+            </a:r>
+            <a:r>
+              <a:rPr lang="en-US" altLang="zh-CN"/>
+              <a:t>——Self-Consistency </a:t>
+            </a:r>
+            <a:r>
+              <a:rPr lang="zh-CN" altLang="en-US"/>
+              <a:t>的多数投票、</a:t>
+            </a:r>
+            <a:r>
+              <a:rPr lang="en-US" altLang="zh-CN"/>
+              <a:t>KATE </a:t>
+            </a:r>
+            <a:r>
+              <a:rPr lang="zh-CN" altLang="en-US"/>
+              <a:t>的 </a:t>
+            </a:r>
+            <a:r>
+              <a:rPr lang="en-US" altLang="zh-CN"/>
+              <a:t>kNN </a:t>
+            </a:r>
+            <a:r>
+              <a:rPr lang="zh-CN" altLang="en-US"/>
+              <a:t>检索少样本、</a:t>
+            </a:r>
+            <a:r>
+              <a:rPr lang="en-US" altLang="zh-CN"/>
+              <a:t>Lost-in-the-Middle </a:t>
+            </a:r>
+            <a:r>
+              <a:rPr lang="zh-CN" altLang="en-US"/>
+              <a:t>的首尾块处理、</a:t>
+            </a:r>
+            <a:r>
+              <a:rPr lang="en-US" altLang="zh-CN"/>
+              <a:t>RAG </a:t>
+            </a:r>
+            <a:r>
+              <a:rPr lang="zh-CN" altLang="en-US"/>
+              <a:t>的可溯源 </a:t>
+            </a:r>
+            <a:r>
+              <a:rPr lang="en-US" altLang="zh-CN"/>
+              <a:t>grounding </a:t>
+            </a:r>
+            <a:r>
+              <a:rPr lang="zh-CN" altLang="en-US"/>
+              <a:t>等，未落地的如实标注，不夸大。</a:t>
+            </a:r>
+            <a:endParaRPr/>
           </a:p>
         </p:txBody>
       </p:sp>
@@ -732,8 +1188,104 @@
           <a:lstStyle/>
           <a:p>
             <a:r>
-              <a:t>在数据安全和企业适配上，合同是核心商业机密，所以我们的原则是数据本地处理、支持纯规则降级。云端调用前自动脱敏——公司名替换成甲乙双方、金额替换成 XX 万元，只传条款片段、不传整份合同；无网络或用户拒绝调用 LLM 时自动降级为纯规则引擎模式。部署上提供 Docker Compose 四容器一键部署，评委 15 分钟即可复现；也支持切换本地开源模型做私有化部署，数据不出内网；并预留了企业 OA 对接、SSO 单点登录、知识库 Provider 等集成接口。</a:t>
-            </a:r>
+              <a:rPr lang="en-US" altLang="zh-CN"/>
+              <a:t>【</a:t>
+            </a:r>
+            <a:r>
+              <a:rPr lang="zh-CN" altLang="en-US"/>
+              <a:t>建议 </a:t>
+            </a:r>
+            <a:r>
+              <a:rPr lang="en-US" altLang="zh-CN"/>
+              <a:t>35 </a:t>
+            </a:r>
+            <a:r>
+              <a:rPr lang="zh-CN" altLang="en-US"/>
+              <a:t>秒</a:t>
+            </a:r>
+            <a:r>
+              <a:rPr lang="en-US" altLang="zh-CN"/>
+              <a:t>】</a:t>
+            </a:r>
+          </a:p>
+          <a:p>
+            <a:r>
+              <a:rPr lang="zh-CN" altLang="en-US"/>
+              <a:t>在数据安全和企业适配上，合同是核心商业机密，所以我们的原则是数据本地处理、支持纯规则降级。云端调用前自动脱敏</a:t>
+            </a:r>
+            <a:r>
+              <a:rPr lang="en-US" altLang="zh-CN"/>
+              <a:t>——</a:t>
+            </a:r>
+            <a:r>
+              <a:rPr lang="zh-CN" altLang="en-US"/>
+              <a:t>公司名替换成甲乙双方、金额替换成 </a:t>
+            </a:r>
+            <a:r>
+              <a:rPr lang="en-US" altLang="zh-CN"/>
+              <a:t>XX </a:t>
+            </a:r>
+            <a:r>
+              <a:rPr lang="zh-CN" altLang="en-US"/>
+              <a:t>万元，只传条款片段、不传整份合同；无网络或用户拒绝调用 </a:t>
+            </a:r>
+            <a:r>
+              <a:rPr lang="en-US" altLang="zh-CN"/>
+              <a:t>LLM </a:t>
+            </a:r>
+            <a:r>
+              <a:rPr lang="zh-CN" altLang="en-US"/>
+              <a:t>时自动降级为纯规则引擎模式。部署上提供 </a:t>
+            </a:r>
+            <a:r>
+              <a:rPr lang="en-US" altLang="zh-CN"/>
+              <a:t>Docker Compose </a:t>
+            </a:r>
+            <a:r>
+              <a:rPr lang="zh-CN" altLang="en-US"/>
+              <a:t>两服务编排（</a:t>
+            </a:r>
+            <a:r>
+              <a:rPr lang="en-US" altLang="zh-CN"/>
+              <a:t>api + web</a:t>
+            </a:r>
+            <a:r>
+              <a:rPr lang="zh-CN" altLang="en-US"/>
+              <a:t>）；</a:t>
+            </a:r>
+            <a:r>
+              <a:rPr lang="en-US" altLang="zh-CN"/>
+              <a:t>Docker </a:t>
+            </a:r>
+            <a:r>
+              <a:rPr lang="zh-CN" altLang="en-US"/>
+              <a:t>配置已完成，尚未实测；也支持切换本地开源模型做私有化部署，数据不出内网；并预留了企业 </a:t>
+            </a:r>
+            <a:r>
+              <a:rPr lang="en-US" altLang="zh-CN"/>
+              <a:t>OA </a:t>
+            </a:r>
+            <a:r>
+              <a:rPr lang="zh-CN" altLang="en-US"/>
+              <a:t>对接、</a:t>
+            </a:r>
+            <a:r>
+              <a:rPr lang="en-US" altLang="zh-CN"/>
+              <a:t>SSO </a:t>
+            </a:r>
+            <a:r>
+              <a:rPr lang="zh-CN" altLang="en-US"/>
+              <a:t>单点登录、知识库 </a:t>
+            </a:r>
+            <a:r>
+              <a:rPr lang="en-US" altLang="zh-CN"/>
+              <a:t>Provider </a:t>
+            </a:r>
+            <a:r>
+              <a:rPr lang="zh-CN" altLang="en-US"/>
+              <a:t>等集成接口。</a:t>
+            </a:r>
+            <a:endParaRPr/>
           </a:p>
         </p:txBody>
       </p:sp>
@@ -802,8 +1354,80 @@
           <a:lstStyle/>
           <a:p>
             <a:r>
-              <a:t>开发按线下设计、线上开发、评测冲刺三阶段推进，现在已全部交付。P0 的核心流程——上传、解析、分类、要素抽取、规则召回、证据裁决、建议层、条款比对、报告——全部跑通。同时我们为 V2.0 规划了自定义规则引擎、合同版本对比、企业知识库管理、RBAC 三级权限、知识图谱可视化等功能，这些已完成需求分析和概要设计。V2.0 的定位是想说明，这个项目有清晰的演进路径，不是做完就扔。</a:t>
-            </a:r>
+              <a:rPr lang="en-US" altLang="zh-CN"/>
+              <a:t>【</a:t>
+            </a:r>
+            <a:r>
+              <a:rPr lang="zh-CN" altLang="en-US"/>
+              <a:t>建议 </a:t>
+            </a:r>
+            <a:r>
+              <a:rPr lang="en-US" altLang="zh-CN"/>
+              <a:t>25 </a:t>
+            </a:r>
+            <a:r>
+              <a:rPr lang="zh-CN" altLang="en-US"/>
+              <a:t>秒</a:t>
+            </a:r>
+            <a:r>
+              <a:rPr lang="en-US" altLang="zh-CN"/>
+              <a:t>】</a:t>
+            </a:r>
+          </a:p>
+          <a:p>
+            <a:r>
+              <a:rPr lang="zh-CN" altLang="en-US"/>
+              <a:t>开发按线下设计、线上开发、评测冲刺三阶段推进，现在已全部交付。</a:t>
+            </a:r>
+            <a:r>
+              <a:rPr lang="en-US" altLang="zh-CN"/>
+              <a:t>P0 </a:t>
+            </a:r>
+            <a:r>
+              <a:rPr lang="zh-CN" altLang="en-US"/>
+              <a:t>的核心流程</a:t>
+            </a:r>
+            <a:r>
+              <a:rPr lang="en-US" altLang="zh-CN"/>
+              <a:t>——</a:t>
+            </a:r>
+            <a:r>
+              <a:rPr lang="zh-CN" altLang="en-US"/>
+              <a:t>上传、解析、分类、要素抽取、规则召回、证据裁决、建议层、条款比对、报告</a:t>
+            </a:r>
+            <a:r>
+              <a:rPr lang="en-US" altLang="zh-CN"/>
+              <a:t>——</a:t>
+            </a:r>
+            <a:r>
+              <a:rPr lang="zh-CN" altLang="en-US"/>
+              <a:t>全部跑通。同时我们为 </a:t>
+            </a:r>
+            <a:r>
+              <a:rPr lang="en-US" altLang="zh-CN"/>
+              <a:t>V2.0 </a:t>
+            </a:r>
+            <a:r>
+              <a:rPr lang="zh-CN" altLang="en-US"/>
+              <a:t>规划了自定义规则引擎、合同版本对比、企业知识库管理、</a:t>
+            </a:r>
+            <a:r>
+              <a:rPr lang="en-US" altLang="zh-CN"/>
+              <a:t>RBAC </a:t>
+            </a:r>
+            <a:r>
+              <a:rPr lang="zh-CN" altLang="en-US"/>
+              <a:t>三级权限、知识图谱可视化等功能，这些已完成需求分析和概要设计。</a:t>
+            </a:r>
+            <a:r>
+              <a:rPr lang="en-US" altLang="zh-CN"/>
+              <a:t>V2.0 </a:t>
+            </a:r>
+            <a:r>
+              <a:rPr lang="zh-CN" altLang="en-US"/>
+              <a:t>的定位是想说明，这个项目有清晰的演进路径，不是做完就扔。</a:t>
+            </a:r>
+            <a:endParaRPr/>
           </a:p>
         </p:txBody>
       </p:sp>
@@ -872,8 +1496,96 @@
           <a:lstStyle/>
           <a:p>
             <a:r>
-              <a:t>最后总结三点。第一，赛题三大硬指标全部达标、分类和要素更是大幅超额；第二，我们的核心创新是证据-裁决解耦，用「LLM 抽事实 + 代码确定性裁决」根治大模型的幻觉和不确定性，把精准率从 24% 做到 76.6%；第三，我们交付的是一个从上传到报告的完整工程闭环，Docker 一键部署、可复现可审计。我们的价值主张是：把法务从逐条比对中解放出来，5 分钟完成一份百页合同的全面审核——不只是找风险，更是沉淀企业法务知识资产。感谢各位评委老师，请批评指正。</a:t>
-            </a:r>
+              <a:rPr lang="en-US" altLang="zh-CN"/>
+              <a:t>【</a:t>
+            </a:r>
+            <a:r>
+              <a:rPr lang="zh-CN" altLang="en-US"/>
+              <a:t>建议 </a:t>
+            </a:r>
+            <a:r>
+              <a:rPr lang="en-US" altLang="zh-CN"/>
+              <a:t>35 </a:t>
+            </a:r>
+            <a:r>
+              <a:rPr lang="zh-CN" altLang="en-US"/>
+              <a:t>秒</a:t>
+            </a:r>
+            <a:r>
+              <a:rPr lang="en-US" altLang="zh-CN"/>
+              <a:t>】</a:t>
+            </a:r>
+          </a:p>
+          <a:p>
+            <a:r>
+              <a:rPr lang="zh-CN" altLang="en-US"/>
+              <a:t>最后总结三点。第一，赛题三大硬指标全部达标、分类和要素更是大幅超额；第二，我们的核心创新是证据</a:t>
+            </a:r>
+            <a:r>
+              <a:rPr lang="en-US" altLang="zh-CN"/>
+              <a:t>-</a:t>
+            </a:r>
+            <a:r>
+              <a:rPr lang="zh-CN" altLang="en-US"/>
+              <a:t>裁决解耦，用「</a:t>
+            </a:r>
+            <a:r>
+              <a:rPr lang="en-US" altLang="zh-CN"/>
+              <a:t>LLM </a:t>
+            </a:r>
+            <a:r>
+              <a:rPr lang="zh-CN" altLang="en-US"/>
+              <a:t>抽事实 </a:t>
+            </a:r>
+            <a:r>
+              <a:rPr lang="en-US" altLang="zh-CN"/>
+              <a:t>+ </a:t>
+            </a:r>
+            <a:r>
+              <a:rPr lang="zh-CN" altLang="en-US"/>
+              <a:t>代码确定性裁决」根治大模型的幻觉和不确定性，把精准率从 </a:t>
+            </a:r>
+            <a:r>
+              <a:rPr lang="en-US" altLang="zh-CN"/>
+              <a:t>24% </a:t>
+            </a:r>
+            <a:r>
+              <a:rPr lang="zh-CN" altLang="en-US"/>
+              <a:t>做到 </a:t>
+            </a:r>
+            <a:r>
+              <a:rPr lang="en-US" altLang="zh-CN"/>
+              <a:t>76.6%</a:t>
+            </a:r>
+            <a:r>
+              <a:rPr lang="zh-CN" altLang="en-US"/>
+              <a:t>；第三，我们交付的是一个从上传到报告的完整工程闭环，</a:t>
+            </a:r>
+            <a:r>
+              <a:rPr lang="en-US" altLang="zh-CN"/>
+              <a:t>prepare.bat + start.bat </a:t>
+            </a:r>
+            <a:r>
+              <a:rPr lang="zh-CN" altLang="en-US"/>
+              <a:t>本地一键启动，可复现可审计。我们的价值主张是：把法务从逐条比对中解放出来，</a:t>
+            </a:r>
+            <a:r>
+              <a:rPr lang="en-US" altLang="zh-CN"/>
+              <a:t>5 </a:t>
+            </a:r>
+            <a:r>
+              <a:rPr lang="zh-CN" altLang="en-US"/>
+              <a:t>分钟完成一份百页合同的全面审核</a:t>
+            </a:r>
+            <a:r>
+              <a:rPr lang="en-US" altLang="zh-CN"/>
+              <a:t>——</a:t>
+            </a:r>
+            <a:r>
+              <a:rPr lang="zh-CN" altLang="en-US"/>
+              <a:t>不只是找风险，更是沉淀企业法务知识资产。感谢各位评委老师，请批评指正。</a:t>
+            </a:r>
+            <a:endParaRPr/>
           </a:p>
         </p:txBody>
       </p:sp>
@@ -942,8 +1654,121 @@
           <a:lstStyle/>
           <a:p>
             <a:r>
-              <a:t>汇报分为六个部分：先说项目背景与痛点，再对照赛题要求看三大硬指标的达标情况；接着讲系统架构和审核链路；然后展开四大核心技术方案；重点讲我们的核心创新「证据-裁决解耦」；最后总结创新亮点、工程落地与未来规划。</a:t>
-            </a:r>
+              <a:rPr lang="en-US" altLang="zh-CN"/>
+              <a:t>【</a:t>
+            </a:r>
+            <a:r>
+              <a:rPr lang="zh-CN" altLang="en-US"/>
+              <a:t>建议 </a:t>
+            </a:r>
+            <a:r>
+              <a:rPr lang="en-US" altLang="zh-CN"/>
+              <a:t>25 </a:t>
+            </a:r>
+            <a:r>
+              <a:rPr lang="zh-CN" altLang="en-US"/>
+              <a:t>秒</a:t>
+            </a:r>
+            <a:r>
+              <a:rPr lang="en-US" altLang="zh-CN"/>
+              <a:t>】</a:t>
+            </a:r>
+          </a:p>
+          <a:p>
+            <a:r>
+              <a:rPr lang="zh-CN" altLang="en-US"/>
+              <a:t>时长分配：本稿共 </a:t>
+            </a:r>
+            <a:r>
+              <a:rPr lang="en-US" altLang="zh-CN"/>
+              <a:t>17 </a:t>
+            </a:r>
+            <a:r>
+              <a:rPr lang="zh-CN" altLang="en-US"/>
+              <a:t>页，建议讲解 </a:t>
+            </a:r>
+            <a:r>
+              <a:rPr lang="en-US" altLang="zh-CN"/>
+              <a:t>12 </a:t>
+            </a:r>
+            <a:r>
+              <a:rPr lang="zh-CN" altLang="en-US"/>
+              <a:t>分 </a:t>
+            </a:r>
+            <a:r>
+              <a:rPr lang="en-US" altLang="zh-CN"/>
+              <a:t>30 </a:t>
+            </a:r>
+            <a:r>
+              <a:rPr lang="zh-CN" altLang="en-US"/>
+              <a:t>秒～</a:t>
+            </a:r>
+            <a:r>
+              <a:rPr lang="en-US" altLang="zh-CN"/>
+              <a:t>13 </a:t>
+            </a:r>
+            <a:r>
+              <a:rPr lang="zh-CN" altLang="en-US"/>
+              <a:t>分 </a:t>
+            </a:r>
+            <a:r>
+              <a:rPr lang="en-US" altLang="zh-CN"/>
+              <a:t>30 </a:t>
+            </a:r>
+            <a:r>
+              <a:rPr lang="zh-CN" altLang="en-US"/>
+              <a:t>秒（比赛上限 </a:t>
+            </a:r>
+            <a:r>
+              <a:rPr lang="en-US" altLang="zh-CN"/>
+              <a:t>15 </a:t>
+            </a:r>
+            <a:r>
+              <a:rPr lang="zh-CN" altLang="en-US"/>
+              <a:t>分钟以内）；各页建议时长见每页备注开头的</a:t>
+            </a:r>
+            <a:r>
+              <a:rPr lang="en-US" altLang="zh-CN"/>
+              <a:t>【</a:t>
+            </a:r>
+            <a:r>
+              <a:rPr lang="zh-CN" altLang="en-US"/>
+              <a:t>建议 </a:t>
+            </a:r>
+            <a:r>
+              <a:rPr lang="en-US" altLang="zh-CN"/>
+              <a:t>x </a:t>
+            </a:r>
+            <a:r>
+              <a:rPr lang="zh-CN" altLang="en-US"/>
+              <a:t>秒</a:t>
+            </a:r>
+            <a:r>
+              <a:rPr lang="en-US" altLang="zh-CN"/>
+              <a:t>】</a:t>
+            </a:r>
+            <a:r>
+              <a:rPr lang="zh-CN" altLang="en-US"/>
+              <a:t>，留出提问与现场操作余量。</a:t>
+            </a:r>
+          </a:p>
+          <a:p>
+            <a:endParaRPr lang="zh-CN" altLang="en-US"/>
+          </a:p>
+          <a:p>
+            <a:r>
+              <a:rPr lang="zh-CN" altLang="en-US"/>
+              <a:t>汇报分为六个部分：先说项目背景与痛点，再对照赛题要求看三大硬指标的达标情况；接着讲系统架构和审核链路；然后展开四大核心技术方案；重点讲我们的核心创新「证据</a:t>
+            </a:r>
+            <a:r>
+              <a:rPr lang="en-US" altLang="zh-CN"/>
+              <a:t>-</a:t>
+            </a:r>
+            <a:r>
+              <a:rPr lang="zh-CN" altLang="en-US"/>
+              <a:t>裁决解耦」；最后总结创新亮点、工程落地与未来规划。</a:t>
+            </a:r>
+            <a:endParaRPr/>
           </a:p>
         </p:txBody>
       </p:sp>
@@ -1012,8 +1837,104 @@
           <a:lstStyle/>
           <a:p>
             <a:r>
-              <a:t>先看背景。网新恒天作为国内领先的 IT 服务与金融科技企业，法务部每天面对大量技术服务、软件开发外包、SaaS 协议和金融合作协议。传统模式下，一份典型的技术外包合同完整审核需要 2 到 4 小时，而且行业特有风险——比如 SLA 罚则、数据导出销毁、源代码托管、IP 归属——很难靠通用经验覆盖。更棘手的是，法务知识沉淀在个人脑中，人一走经验就没了。我们的系统把审核时间压缩到 5 到 15 分钟，风险遗漏率降到 5% 以下，同时把审核知识系统化沉淀下来。</a:t>
-            </a:r>
+              <a:rPr lang="en-US" altLang="zh-CN"/>
+              <a:t>【</a:t>
+            </a:r>
+            <a:r>
+              <a:rPr lang="zh-CN" altLang="en-US"/>
+              <a:t>建议 </a:t>
+            </a:r>
+            <a:r>
+              <a:rPr lang="en-US" altLang="zh-CN"/>
+              <a:t>50 </a:t>
+            </a:r>
+            <a:r>
+              <a:rPr lang="zh-CN" altLang="en-US"/>
+              <a:t>秒</a:t>
+            </a:r>
+            <a:r>
+              <a:rPr lang="en-US" altLang="zh-CN"/>
+              <a:t>】</a:t>
+            </a:r>
+          </a:p>
+          <a:p>
+            <a:r>
+              <a:rPr lang="zh-CN" altLang="en-US"/>
+              <a:t>先看背景。网新恒天作为国内领先的 </a:t>
+            </a:r>
+            <a:r>
+              <a:rPr lang="en-US" altLang="zh-CN"/>
+              <a:t>IT </a:t>
+            </a:r>
+            <a:r>
+              <a:rPr lang="zh-CN" altLang="en-US"/>
+              <a:t>服务与金融科技企业，法务部每天面对大量技术服务、软件开发外包、</a:t>
+            </a:r>
+            <a:r>
+              <a:rPr lang="en-US" altLang="zh-CN"/>
+              <a:t>SaaS </a:t>
+            </a:r>
+            <a:r>
+              <a:rPr lang="zh-CN" altLang="en-US"/>
+              <a:t>协议和金融合作协议。传统模式下，一份典型的技术外包合同完整审核需要 </a:t>
+            </a:r>
+            <a:r>
+              <a:rPr lang="en-US" altLang="zh-CN"/>
+              <a:t>2 </a:t>
+            </a:r>
+            <a:r>
+              <a:rPr lang="zh-CN" altLang="en-US"/>
+              <a:t>到 </a:t>
+            </a:r>
+            <a:r>
+              <a:rPr lang="en-US" altLang="zh-CN"/>
+              <a:t>4 </a:t>
+            </a:r>
+            <a:r>
+              <a:rPr lang="zh-CN" altLang="en-US"/>
+              <a:t>小时，而且行业特有风险</a:t>
+            </a:r>
+            <a:r>
+              <a:rPr lang="en-US" altLang="zh-CN"/>
+              <a:t>——</a:t>
+            </a:r>
+            <a:r>
+              <a:rPr lang="zh-CN" altLang="en-US"/>
+              <a:t>比如 </a:t>
+            </a:r>
+            <a:r>
+              <a:rPr lang="en-US" altLang="zh-CN"/>
+              <a:t>SLA </a:t>
+            </a:r>
+            <a:r>
+              <a:rPr lang="zh-CN" altLang="en-US"/>
+              <a:t>罚则、数据导出销毁、源代码托管、</a:t>
+            </a:r>
+            <a:r>
+              <a:rPr lang="en-US" altLang="zh-CN"/>
+              <a:t>IP </a:t>
+            </a:r>
+            <a:r>
+              <a:rPr lang="zh-CN" altLang="en-US"/>
+              <a:t>归属</a:t>
+            </a:r>
+            <a:r>
+              <a:rPr lang="en-US" altLang="zh-CN"/>
+              <a:t>——</a:t>
+            </a:r>
+            <a:r>
+              <a:rPr lang="zh-CN" altLang="en-US"/>
+              <a:t>很难靠通用经验覆盖。更棘手的是，法务知识沉淀在个人脑中，人一走经验就没了。我们的系统把解析、分类与要素抽取压缩到约 </a:t>
+            </a:r>
+            <a:r>
+              <a:rPr lang="en-US" altLang="zh-CN"/>
+              <a:t>40 </a:t>
+            </a:r>
+            <a:r>
+              <a:rPr lang="zh-CN" altLang="en-US"/>
+              <a:t>秒，精细审核按合同长度在分钟级完成，同时把审核依据与人工反馈经验留痕沉淀（反馈经验库当前尚无真实数据）。</a:t>
+            </a:r>
+            <a:endParaRPr/>
           </a:p>
         </p:txBody>
       </p:sp>
@@ -1082,8 +2003,136 @@
           <a:lstStyle/>
           <a:p>
             <a:r>
-              <a:t>对照赛题，三大硬指标全部超额完成。合同分类准确率 98.6%，赛题要求 85%，超额 13.6 个百分点，是在 147 份正式测试集上测出来的；要素抽取 F1 达到 93.7%，超额 13.7 个百分点；风险识别我们覆盖了 13 类风险，召回率 80.1%、精准率 76.6%，双双超过 75% 的门槛。需要说明的是，这些不是 PPT 数字，而是冻结测试集上可复现的实测结果，评测脚本和 gold 标注都在仓库里。</a:t>
-            </a:r>
+              <a:rPr lang="en-US" altLang="zh-CN"/>
+              <a:t>【</a:t>
+            </a:r>
+            <a:r>
+              <a:rPr lang="zh-CN" altLang="en-US"/>
+              <a:t>建议 </a:t>
+            </a:r>
+            <a:r>
+              <a:rPr lang="en-US" altLang="zh-CN"/>
+              <a:t>50 </a:t>
+            </a:r>
+            <a:r>
+              <a:rPr lang="zh-CN" altLang="en-US"/>
+              <a:t>秒</a:t>
+            </a:r>
+            <a:r>
+              <a:rPr lang="en-US" altLang="zh-CN"/>
+              <a:t>】</a:t>
+            </a:r>
+          </a:p>
+          <a:p>
+            <a:r>
+              <a:rPr lang="zh-CN" altLang="en-US"/>
+              <a:t>对照赛题，三大硬指标全部超额完成。合同分类准确率 </a:t>
+            </a:r>
+            <a:r>
+              <a:rPr lang="en-US" altLang="zh-CN"/>
+              <a:t>98.6%</a:t>
+            </a:r>
+            <a:r>
+              <a:rPr lang="zh-CN" altLang="en-US"/>
+              <a:t>，赛题要求 </a:t>
+            </a:r>
+            <a:r>
+              <a:rPr lang="en-US" altLang="zh-CN"/>
+              <a:t>85%</a:t>
+            </a:r>
+            <a:r>
+              <a:rPr lang="zh-CN" altLang="en-US"/>
+              <a:t>，超额 </a:t>
+            </a:r>
+            <a:r>
+              <a:rPr lang="en-US" altLang="zh-CN"/>
+              <a:t>13.6 </a:t>
+            </a:r>
+            <a:r>
+              <a:rPr lang="zh-CN" altLang="en-US"/>
+              <a:t>个百分点，是在 </a:t>
+            </a:r>
+            <a:r>
+              <a:rPr lang="en-US" altLang="zh-CN"/>
+              <a:t>147 </a:t>
+            </a:r>
+            <a:r>
+              <a:rPr lang="zh-CN" altLang="en-US"/>
+              <a:t>份正式测试集上测出来的；要素抽取 </a:t>
+            </a:r>
+            <a:r>
+              <a:rPr lang="en-US" altLang="zh-CN"/>
+              <a:t>F1 </a:t>
+            </a:r>
+            <a:r>
+              <a:rPr lang="zh-CN" altLang="en-US"/>
+              <a:t>达到 </a:t>
+            </a:r>
+            <a:r>
+              <a:rPr lang="en-US" altLang="zh-CN"/>
+              <a:t>93.7%</a:t>
+            </a:r>
+            <a:r>
+              <a:rPr lang="zh-CN" altLang="en-US"/>
+              <a:t>，超额 </a:t>
+            </a:r>
+            <a:r>
+              <a:rPr lang="en-US" altLang="zh-CN"/>
+              <a:t>13.7 </a:t>
+            </a:r>
+            <a:r>
+              <a:rPr lang="zh-CN" altLang="en-US"/>
+              <a:t>个百分点；风险识别我们覆盖了 </a:t>
+            </a:r>
+            <a:r>
+              <a:rPr lang="en-US" altLang="zh-CN"/>
+              <a:t>13 </a:t>
+            </a:r>
+            <a:r>
+              <a:rPr lang="zh-CN" altLang="en-US"/>
+              <a:t>类风险，召回率 </a:t>
+            </a:r>
+            <a:r>
+              <a:rPr lang="en-US" altLang="zh-CN"/>
+              <a:t>80.1%</a:t>
+            </a:r>
+            <a:r>
+              <a:rPr lang="zh-CN" altLang="en-US"/>
+              <a:t>、精准率 </a:t>
+            </a:r>
+            <a:r>
+              <a:rPr lang="en-US" altLang="zh-CN"/>
+              <a:t>76.6%</a:t>
+            </a:r>
+            <a:r>
+              <a:rPr lang="zh-CN" altLang="en-US"/>
+              <a:t>，双双超过 </a:t>
+            </a:r>
+            <a:r>
+              <a:rPr lang="en-US" altLang="zh-CN"/>
+              <a:t>75% </a:t>
+            </a:r>
+            <a:r>
+              <a:rPr lang="zh-CN" altLang="en-US"/>
+              <a:t>的门槛。需要说明的是，这些不是 </a:t>
+            </a:r>
+            <a:r>
+              <a:rPr lang="en-US" altLang="zh-CN"/>
+              <a:t>PPT </a:t>
+            </a:r>
+            <a:r>
+              <a:rPr lang="zh-CN" altLang="en-US"/>
+              <a:t>数字，而是冻结测试集上可复现的实测结果，评测脚本和 </a:t>
+            </a:r>
+            <a:r>
+              <a:rPr lang="en-US" altLang="zh-CN"/>
+              <a:t>gold </a:t>
+            </a:r>
+            <a:r>
+              <a:rPr lang="zh-CN" altLang="en-US"/>
+              <a:t>标注都在仓库里。</a:t>
+            </a:r>
+            <a:endParaRPr/>
           </a:p>
         </p:txBody>
       </p:sp>
@@ -1152,8 +2201,112 @@
           <a:lstStyle/>
           <a:p>
             <a:r>
-              <a:t>系统采用经典的四层架构。第一层是 Vue 3 前端，承载上传、审核结果、报告、反馈等五个核心页面；第二层是 FastAPI 业务后端，负责认证、合同管理、审核调度；第三层是 AI 核心引擎，作为同进程 Python 包被业务层直接调用，不走 HTTP，省去序列化开销；第四层是数据持久层，MySQL 存业务数据、ChromaDB 存向量知识库、文件系统存合同原件。一个关键决策是全栈 Python——AI 逻辑和业务逻辑在同一进程，用函数调用代替服务间通信。</a:t>
-            </a:r>
+              <a:rPr lang="en-US" altLang="zh-CN"/>
+              <a:t>【</a:t>
+            </a:r>
+            <a:r>
+              <a:rPr lang="zh-CN" altLang="en-US"/>
+              <a:t>建议 </a:t>
+            </a:r>
+            <a:r>
+              <a:rPr lang="en-US" altLang="zh-CN"/>
+              <a:t>45 </a:t>
+            </a:r>
+            <a:r>
+              <a:rPr lang="zh-CN" altLang="en-US"/>
+              <a:t>秒</a:t>
+            </a:r>
+            <a:r>
+              <a:rPr lang="en-US" altLang="zh-CN"/>
+              <a:t>】</a:t>
+            </a:r>
+          </a:p>
+          <a:p>
+            <a:r>
+              <a:rPr lang="zh-CN" altLang="en-US"/>
+              <a:t>系统采用经典的四层架构。第一层是 </a:t>
+            </a:r>
+            <a:r>
+              <a:rPr lang="en-US" altLang="zh-CN"/>
+              <a:t>Vue 3 </a:t>
+            </a:r>
+            <a:r>
+              <a:rPr lang="zh-CN" altLang="en-US"/>
+              <a:t>前端，承载上传、审核结果、报告、反馈等五个核心页面；第二层是 </a:t>
+            </a:r>
+            <a:r>
+              <a:rPr lang="en-US" altLang="zh-CN"/>
+              <a:t>FastAPI </a:t>
+            </a:r>
+            <a:r>
+              <a:rPr lang="zh-CN" altLang="en-US"/>
+              <a:t>业务后端，负责认证、合同管理、审核调度；第三层是 </a:t>
+            </a:r>
+            <a:r>
+              <a:rPr lang="en-US" altLang="zh-CN"/>
+              <a:t>AI </a:t>
+            </a:r>
+            <a:r>
+              <a:rPr lang="zh-CN" altLang="en-US"/>
+              <a:t>核心引擎，作为同进程 </a:t>
+            </a:r>
+            <a:r>
+              <a:rPr lang="en-US" altLang="zh-CN"/>
+              <a:t>Python </a:t>
+            </a:r>
+            <a:r>
+              <a:rPr lang="zh-CN" altLang="en-US"/>
+              <a:t>包被业务层直接调用，不走 </a:t>
+            </a:r>
+            <a:r>
+              <a:rPr lang="en-US" altLang="zh-CN"/>
+              <a:t>HTTP</a:t>
+            </a:r>
+            <a:r>
+              <a:rPr lang="zh-CN" altLang="en-US"/>
+              <a:t>，省去序列化开销；第四层是数据持久层：交付默认用 </a:t>
+            </a:r>
+            <a:r>
+              <a:rPr lang="en-US" altLang="zh-CN"/>
+              <a:t>SQLite</a:t>
+            </a:r>
+            <a:r>
+              <a:rPr lang="zh-CN" altLang="en-US"/>
+              <a:t>（开启 </a:t>
+            </a:r>
+            <a:r>
+              <a:rPr lang="en-US" altLang="zh-CN"/>
+              <a:t>WAL</a:t>
+            </a:r>
+            <a:r>
+              <a:rPr lang="zh-CN" altLang="en-US"/>
+              <a:t>）存业务数据，</a:t>
+            </a:r>
+            <a:r>
+              <a:rPr lang="en-US" altLang="zh-CN"/>
+              <a:t>ChromaDB </a:t>
+            </a:r>
+            <a:r>
+              <a:rPr lang="zh-CN" altLang="en-US"/>
+              <a:t>以嵌入式方式存向量知识库，文件系统存合同原件；</a:t>
+            </a:r>
+            <a:r>
+              <a:rPr lang="en-US" altLang="zh-CN"/>
+              <a:t>MySQL </a:t>
+            </a:r>
+            <a:r>
+              <a:rPr lang="zh-CN" altLang="en-US"/>
+              <a:t>是已实现的备选路径，不是默认部署方式。一个关键决策是全栈 </a:t>
+            </a:r>
+            <a:r>
+              <a:rPr lang="en-US" altLang="zh-CN"/>
+              <a:t>Python——AI </a:t>
+            </a:r>
+            <a:r>
+              <a:rPr lang="zh-CN" altLang="en-US"/>
+              <a:t>逻辑和业务逻辑在同一进程，用函数调用代替服务间通信。</a:t>
+            </a:r>
+            <a:endParaRPr/>
           </a:p>
         </p:txBody>
       </p:sp>
@@ -1222,8 +2375,144 @@
           <a:lstStyle/>
           <a:p>
             <a:r>
-              <a:t>审核主链路分五步。第一步解析理解：支持 docx、pdf、扫描件 OCR，然后做智能分类和要素抽取；第二步规则召回：用确定性正则先扫一遍 13 类风险，它既是 fast 模式的基线，也是 precise 模式异常时的兜底；第三步证据裁决：这是我们的核心——LLM 只抽取条款的客观事实证据，风险判定交给 Python 代码按硬阈值裁决；第四步建议生成：按法条编号精确取条文，再由 LLM 生成修改建议并做 grounding 校验；第五步输出沉淀：条款定位、条款比对、生成结构化报告。系统提供 fast 和 precise 两个模式，全链路 temperature 设为 0，保证结论可复现。</a:t>
-            </a:r>
+              <a:rPr lang="en-US" altLang="zh-CN"/>
+              <a:t>【</a:t>
+            </a:r>
+            <a:r>
+              <a:rPr lang="zh-CN" altLang="en-US"/>
+              <a:t>建议 </a:t>
+            </a:r>
+            <a:r>
+              <a:rPr lang="en-US" altLang="zh-CN"/>
+              <a:t>55 </a:t>
+            </a:r>
+            <a:r>
+              <a:rPr lang="zh-CN" altLang="en-US"/>
+              <a:t>秒</a:t>
+            </a:r>
+            <a:r>
+              <a:rPr lang="en-US" altLang="zh-CN"/>
+              <a:t>】</a:t>
+            </a:r>
+          </a:p>
+          <a:p>
+            <a:r>
+              <a:rPr lang="zh-CN" altLang="en-US"/>
+              <a:t>审核主链路分五步。第一步解析理解：支持 </a:t>
+            </a:r>
+            <a:r>
+              <a:rPr lang="en-US" altLang="zh-CN"/>
+              <a:t>docx</a:t>
+            </a:r>
+            <a:r>
+              <a:rPr lang="zh-CN" altLang="en-US"/>
+              <a:t>、</a:t>
+            </a:r>
+            <a:r>
+              <a:rPr lang="en-US" altLang="zh-CN"/>
+              <a:t>pdf</a:t>
+            </a:r>
+            <a:r>
+              <a:rPr lang="zh-CN" altLang="en-US"/>
+              <a:t>、扫描件 </a:t>
+            </a:r>
+            <a:r>
+              <a:rPr lang="en-US" altLang="zh-CN"/>
+              <a:t>OCR</a:t>
+            </a:r>
+            <a:r>
+              <a:rPr lang="zh-CN" altLang="en-US"/>
+              <a:t>，然后做智能分类和要素抽取；第二步规则召回：用确定性正则先扫一遍 </a:t>
+            </a:r>
+            <a:r>
+              <a:rPr lang="en-US" altLang="zh-CN"/>
+              <a:t>13 </a:t>
+            </a:r>
+            <a:r>
+              <a:rPr lang="zh-CN" altLang="en-US"/>
+              <a:t>类风险，它既是 </a:t>
+            </a:r>
+            <a:r>
+              <a:rPr lang="en-US" altLang="zh-CN"/>
+              <a:t>fast </a:t>
+            </a:r>
+            <a:r>
+              <a:rPr lang="zh-CN" altLang="en-US"/>
+              <a:t>模式的基线，也是 </a:t>
+            </a:r>
+            <a:r>
+              <a:rPr lang="en-US" altLang="zh-CN"/>
+              <a:t>precise </a:t>
+            </a:r>
+            <a:r>
+              <a:rPr lang="zh-CN" altLang="en-US"/>
+              <a:t>模式异常时的兜底；第三步证据裁决：这是我们的核心</a:t>
+            </a:r>
+            <a:r>
+              <a:rPr lang="en-US" altLang="zh-CN"/>
+              <a:t>——LLM </a:t>
+            </a:r>
+            <a:r>
+              <a:rPr lang="zh-CN" altLang="en-US"/>
+              <a:t>只抽取条款的客观事实证据，风险判定交给 </a:t>
+            </a:r>
+            <a:r>
+              <a:rPr lang="en-US" altLang="zh-CN"/>
+              <a:t>Python </a:t>
+            </a:r>
+            <a:r>
+              <a:rPr lang="zh-CN" altLang="en-US"/>
+              <a:t>代码按硬阈值裁决；第四步建议生成：按法条编号精确取条文，再由 </a:t>
+            </a:r>
+            <a:r>
+              <a:rPr lang="en-US" altLang="zh-CN"/>
+              <a:t>LLM </a:t>
+            </a:r>
+            <a:r>
+              <a:rPr lang="zh-CN" altLang="en-US"/>
+              <a:t>生成修改建议并做 </a:t>
+            </a:r>
+            <a:r>
+              <a:rPr lang="en-US" altLang="zh-CN"/>
+              <a:t>grounding </a:t>
+            </a:r>
+            <a:r>
+              <a:rPr lang="zh-CN" altLang="en-US"/>
+              <a:t>校验；第五步输出沉淀：条款定位、条款比对、生成结构化报告。系统提供 </a:t>
+            </a:r>
+            <a:r>
+              <a:rPr lang="en-US" altLang="zh-CN"/>
+              <a:t>fast </a:t>
+            </a:r>
+            <a:r>
+              <a:rPr lang="zh-CN" altLang="en-US"/>
+              <a:t>和 </a:t>
+            </a:r>
+            <a:r>
+              <a:rPr lang="en-US" altLang="zh-CN"/>
+              <a:t>precise </a:t>
+            </a:r>
+            <a:r>
+              <a:rPr lang="zh-CN" altLang="en-US"/>
+              <a:t>两个模式，全链路 </a:t>
+            </a:r>
+            <a:r>
+              <a:rPr lang="en-US" altLang="zh-CN"/>
+              <a:t>temperature </a:t>
+            </a:r>
+            <a:r>
+              <a:rPr lang="zh-CN" altLang="en-US"/>
+              <a:t>设为 </a:t>
+            </a:r>
+            <a:r>
+              <a:rPr lang="en-US" altLang="zh-CN"/>
+              <a:t>0</a:t>
+            </a:r>
+            <a:r>
+              <a:rPr lang="zh-CN" altLang="en-US"/>
+              <a:t>，保证结论可复现。</a:t>
+            </a:r>
+            <a:endParaRPr/>
           </a:p>
         </p:txBody>
       </p:sp>
@@ -1292,8 +2581,128 @@
           <a:lstStyle/>
           <a:p>
             <a:r>
-              <a:t>这是整个项目最核心的创新——证据-裁决解耦。直接让 LLM 判断风险有两个致命问题：幻觉和不一致。它会编造原文根本不存在的风险条款，而且同一份合同两次审核结论会漂移。我们的做法是把「有没有风险」和「怎么改」彻底拆开：LLM 只用一套冻结的 JSON Schema 抽取客观事实证据，找不到就填 null、绝不臆测、不下风险结论；风险判定完全交给 Python 代码按法条硬阈值裁决，模棱两可的一律不标。打个比方：我们不问 AI『这条有没有风险』，只让它做笔录抽取事实，然后让代码当法官按阈值一锤定音。AI 记错了，法官核对原文就能发现；AI 判错了，没法核对。</a:t>
-            </a:r>
+              <a:rPr lang="en-US" altLang="zh-CN"/>
+              <a:t>【</a:t>
+            </a:r>
+            <a:r>
+              <a:rPr lang="zh-CN" altLang="en-US"/>
+              <a:t>建议 </a:t>
+            </a:r>
+            <a:r>
+              <a:rPr lang="en-US" altLang="zh-CN"/>
+              <a:t>1 </a:t>
+            </a:r>
+            <a:r>
+              <a:rPr lang="zh-CN" altLang="en-US"/>
+              <a:t>分 </a:t>
+            </a:r>
+            <a:r>
+              <a:rPr lang="en-US" altLang="zh-CN"/>
+              <a:t>0 </a:t>
+            </a:r>
+            <a:r>
+              <a:rPr lang="zh-CN" altLang="en-US"/>
+              <a:t>秒</a:t>
+            </a:r>
+            <a:r>
+              <a:rPr lang="en-US" altLang="zh-CN"/>
+              <a:t>】</a:t>
+            </a:r>
+          </a:p>
+          <a:p>
+            <a:r>
+              <a:rPr lang="zh-CN" altLang="en-US"/>
+              <a:t>这是整个项目最核心的创新</a:t>
+            </a:r>
+            <a:r>
+              <a:rPr lang="en-US" altLang="zh-CN"/>
+              <a:t>——</a:t>
+            </a:r>
+            <a:r>
+              <a:rPr lang="zh-CN" altLang="en-US"/>
+              <a:t>证据</a:t>
+            </a:r>
+            <a:r>
+              <a:rPr lang="en-US" altLang="zh-CN"/>
+              <a:t>-</a:t>
+            </a:r>
+            <a:r>
+              <a:rPr lang="zh-CN" altLang="en-US"/>
+              <a:t>裁决解耦。直接让 </a:t>
+            </a:r>
+            <a:r>
+              <a:rPr lang="en-US" altLang="zh-CN"/>
+              <a:t>LLM </a:t>
+            </a:r>
+            <a:r>
+              <a:rPr lang="zh-CN" altLang="en-US"/>
+              <a:t>判断风险有两个致命问题：幻觉和不一致。它会编造原文根本不存在的风险条款，而且同一份合同两次审核结论会漂移。我们的做法是把「有没有风险」和「怎么改」彻底拆开：</a:t>
+            </a:r>
+            <a:r>
+              <a:rPr lang="en-US" altLang="zh-CN"/>
+              <a:t>LLM </a:t>
+            </a:r>
+            <a:r>
+              <a:rPr lang="zh-CN" altLang="en-US"/>
+              <a:t>只用一套冻结的 </a:t>
+            </a:r>
+            <a:r>
+              <a:rPr lang="en-US" altLang="zh-CN"/>
+              <a:t>JSON Schema </a:t>
+            </a:r>
+            <a:r>
+              <a:rPr lang="zh-CN" altLang="en-US"/>
+              <a:t>抽取客观事实证据，找不到就填 </a:t>
+            </a:r>
+            <a:r>
+              <a:rPr lang="en-US" altLang="zh-CN"/>
+              <a:t>null</a:t>
+            </a:r>
+            <a:r>
+              <a:rPr lang="zh-CN" altLang="en-US"/>
+              <a:t>、绝不臆测、不下风险结论；风险判定完全交给 </a:t>
+            </a:r>
+            <a:r>
+              <a:rPr lang="en-US" altLang="zh-CN"/>
+              <a:t>Python </a:t>
+            </a:r>
+            <a:r>
+              <a:rPr lang="zh-CN" altLang="en-US"/>
+              <a:t>代码按法条硬阈值裁决，模棱两可的一律不标。打个比方：我们不问 </a:t>
+            </a:r>
+            <a:r>
+              <a:rPr lang="en-US" altLang="zh-CN"/>
+              <a:t>AI『</a:t>
+            </a:r>
+            <a:r>
+              <a:rPr lang="zh-CN" altLang="en-US"/>
+              <a:t>这条有没有风险</a:t>
+            </a:r>
+            <a:r>
+              <a:rPr lang="en-US" altLang="zh-CN"/>
+              <a:t>』</a:t>
+            </a:r>
+            <a:r>
+              <a:rPr lang="zh-CN" altLang="en-US"/>
+              <a:t>，只让它做笔录抽取事实，然后让代码当法官按阈值一锤定音。</a:t>
+            </a:r>
+            <a:r>
+              <a:rPr lang="en-US" altLang="zh-CN"/>
+              <a:t>AI </a:t>
+            </a:r>
+            <a:r>
+              <a:rPr lang="zh-CN" altLang="en-US"/>
+              <a:t>记错了，法官核对原文就能发现；</a:t>
+            </a:r>
+            <a:r>
+              <a:rPr lang="en-US" altLang="zh-CN"/>
+              <a:t>AI </a:t>
+            </a:r>
+            <a:r>
+              <a:rPr lang="zh-CN" altLang="en-US"/>
+              <a:t>判错了，没法核对。</a:t>
+            </a:r>
+            <a:endParaRPr/>
           </a:p>
         </p:txBody>
       </p:sp>
@@ -1362,8 +2771,152 @@
           <a:lstStyle/>
           <a:p>
             <a:r>
-              <a:t>这套架构不是拍脑袋想出来的，而是用数据迭代出来的。v4 让 LLM 泛化 Prompt 直接判风险，精准率只有 24%，过报了 466 条；v5 把阈值写进提示词，召回率反而被误杀到 73.5%；直到 v6.4，我们把「抽事实」和「裁决」解耦——LLM 只抽事实、代码按硬阈值裁决，精准率从 24% 拉到 76.6%，同时召回率守住 80.1%，F1 达到 78.3%。结论很清楚：LLM 擅长布尔和数值判断，但复杂枚举和嵌套规则应该交给代码。</a:t>
-            </a:r>
+              <a:rPr lang="en-US" altLang="zh-CN"/>
+              <a:t>【</a:t>
+            </a:r>
+            <a:r>
+              <a:rPr lang="zh-CN" altLang="en-US"/>
+              <a:t>建议 </a:t>
+            </a:r>
+            <a:r>
+              <a:rPr lang="en-US" altLang="zh-CN"/>
+              <a:t>55 </a:t>
+            </a:r>
+            <a:r>
+              <a:rPr lang="zh-CN" altLang="en-US"/>
+              <a:t>秒</a:t>
+            </a:r>
+            <a:r>
+              <a:rPr lang="en-US" altLang="zh-CN"/>
+              <a:t>】</a:t>
+            </a:r>
+          </a:p>
+          <a:p>
+            <a:r>
+              <a:rPr lang="zh-CN" altLang="en-US"/>
+              <a:t>这套架构不是拍脑袋想出来的，而是用数据迭代出来的。</a:t>
+            </a:r>
+            <a:r>
+              <a:rPr lang="en-US" altLang="zh-CN"/>
+              <a:t>v4 </a:t>
+            </a:r>
+            <a:r>
+              <a:rPr lang="zh-CN" altLang="en-US"/>
+              <a:t>让 </a:t>
+            </a:r>
+            <a:r>
+              <a:rPr lang="en-US" altLang="zh-CN"/>
+              <a:t>LLM </a:t>
+            </a:r>
+            <a:r>
+              <a:rPr lang="zh-CN" altLang="en-US"/>
+              <a:t>泛化 </a:t>
+            </a:r>
+            <a:r>
+              <a:rPr lang="en-US" altLang="zh-CN"/>
+              <a:t>Prompt </a:t>
+            </a:r>
+            <a:r>
+              <a:rPr lang="zh-CN" altLang="en-US"/>
+              <a:t>直接判风险，精准率只有 </a:t>
+            </a:r>
+            <a:r>
+              <a:rPr lang="en-US" altLang="zh-CN"/>
+              <a:t>24%</a:t>
+            </a:r>
+            <a:r>
+              <a:rPr lang="zh-CN" altLang="en-US"/>
+              <a:t>，过报了 </a:t>
+            </a:r>
+            <a:r>
+              <a:rPr lang="en-US" altLang="zh-CN"/>
+              <a:t>466 </a:t>
+            </a:r>
+            <a:r>
+              <a:rPr lang="zh-CN" altLang="en-US"/>
+              <a:t>条；</a:t>
+            </a:r>
+            <a:r>
+              <a:rPr lang="en-US" altLang="zh-CN"/>
+              <a:t>v5 </a:t>
+            </a:r>
+            <a:r>
+              <a:rPr lang="zh-CN" altLang="en-US"/>
+              <a:t>把阈值写进提示词，召回率反而被误杀到 </a:t>
+            </a:r>
+            <a:r>
+              <a:rPr lang="en-US" altLang="zh-CN"/>
+              <a:t>73.5%</a:t>
+            </a:r>
+            <a:r>
+              <a:rPr lang="zh-CN" altLang="en-US"/>
+              <a:t>；直到 </a:t>
+            </a:r>
+            <a:r>
+              <a:rPr lang="en-US" altLang="zh-CN"/>
+              <a:t>v6.4</a:t>
+            </a:r>
+            <a:r>
+              <a:rPr lang="zh-CN" altLang="en-US"/>
+              <a:t>，我们把「抽事实」和「裁决」解耦</a:t>
+            </a:r>
+            <a:r>
+              <a:rPr lang="en-US" altLang="zh-CN"/>
+              <a:t>——LLM </a:t>
+            </a:r>
+            <a:r>
+              <a:rPr lang="zh-CN" altLang="en-US"/>
+              <a:t>只抽事实、代码按硬阈值裁决，精准率从 </a:t>
+            </a:r>
+            <a:r>
+              <a:rPr lang="en-US" altLang="zh-CN"/>
+              <a:t>24% </a:t>
+            </a:r>
+            <a:r>
+              <a:rPr lang="zh-CN" altLang="en-US"/>
+              <a:t>拉到 </a:t>
+            </a:r>
+            <a:r>
+              <a:rPr lang="en-US" altLang="zh-CN"/>
+              <a:t>76.6%</a:t>
+            </a:r>
+            <a:r>
+              <a:rPr lang="zh-CN" altLang="en-US"/>
+              <a:t>，同时召回率守住 </a:t>
+            </a:r>
+            <a:r>
+              <a:rPr lang="en-US" altLang="zh-CN"/>
+              <a:t>80.1%</a:t>
+            </a:r>
+            <a:r>
+              <a:rPr lang="zh-CN" altLang="en-US"/>
+              <a:t>，</a:t>
+            </a:r>
+            <a:r>
+              <a:rPr lang="en-US" altLang="zh-CN"/>
+              <a:t>F1 </a:t>
+            </a:r>
+            <a:r>
+              <a:rPr lang="zh-CN" altLang="en-US"/>
+              <a:t>达到 </a:t>
+            </a:r>
+            <a:r>
+              <a:rPr lang="en-US" altLang="zh-CN"/>
+              <a:t>78.3%</a:t>
+            </a:r>
+            <a:r>
+              <a:rPr lang="zh-CN" altLang="en-US"/>
+              <a:t>。结论很清楚：</a:t>
+            </a:r>
+            <a:r>
+              <a:rPr lang="en-US" altLang="zh-CN"/>
+              <a:t>LLM </a:t>
+            </a:r>
+            <a:r>
+              <a:rPr lang="zh-CN" altLang="en-US"/>
+              <a:t>擅长布尔和数值判断，但复杂枚举和嵌套规则应该交给代码。</a:t>
+            </a:r>
+            <a:endParaRPr/>
           </a:p>
         </p:txBody>
       </p:sp>
@@ -1432,8 +2985,96 @@
           <a:lstStyle/>
           <a:p>
             <a:r>
-              <a:t>方案一是智能分类与要素抽取。分类采用 RAG 少样本检索加 LLM 法理推理，输出两个正交维度：11 类法理分类加上「服务外包」业务标签。为对抗长合同的中间信息丢失，我们做分块采样加多数投票，分类准确率达到 98.6%。要素抽取用 JSON Schema 约束加 Few-shot，抽取双方、金额、日期、期限、争议解决等字段，长合同分块并行、按非空优先合并，加权综合 F1 达到 93.7%。右边这个位置我放合同详情页的截图，展示要素抽取的结构化结果。</a:t>
-            </a:r>
+              <a:rPr lang="en-US" altLang="zh-CN"/>
+              <a:t>【</a:t>
+            </a:r>
+            <a:r>
+              <a:rPr lang="zh-CN" altLang="en-US"/>
+              <a:t>建议 </a:t>
+            </a:r>
+            <a:r>
+              <a:rPr lang="en-US" altLang="zh-CN"/>
+              <a:t>50 </a:t>
+            </a:r>
+            <a:r>
+              <a:rPr lang="zh-CN" altLang="en-US"/>
+              <a:t>秒</a:t>
+            </a:r>
+            <a:r>
+              <a:rPr lang="en-US" altLang="zh-CN"/>
+              <a:t>】</a:t>
+            </a:r>
+          </a:p>
+          <a:p>
+            <a:r>
+              <a:rPr lang="zh-CN" altLang="en-US"/>
+              <a:t>方案一是智能分类与要素抽取。分类采用 </a:t>
+            </a:r>
+            <a:r>
+              <a:rPr lang="en-US" altLang="zh-CN"/>
+              <a:t>RAG </a:t>
+            </a:r>
+            <a:r>
+              <a:rPr lang="zh-CN" altLang="en-US"/>
+              <a:t>少样本检索加 </a:t>
+            </a:r>
+            <a:r>
+              <a:rPr lang="en-US" altLang="zh-CN"/>
+              <a:t>LLM </a:t>
+            </a:r>
+            <a:r>
+              <a:rPr lang="zh-CN" altLang="en-US"/>
+              <a:t>法理推理，输出两个正交维度：</a:t>
+            </a:r>
+            <a:r>
+              <a:rPr lang="en-US" altLang="zh-CN"/>
+              <a:t>11 </a:t>
+            </a:r>
+            <a:r>
+              <a:rPr lang="zh-CN" altLang="en-US"/>
+              <a:t>类法理分类加上「服务外包」业务标签。为对抗长合同的中间信息丢失，我们做分块采样加多数投票，分类准确率达到 </a:t>
+            </a:r>
+            <a:r>
+              <a:rPr lang="en-US" altLang="zh-CN"/>
+              <a:t>98.6%</a:t>
+            </a:r>
+            <a:r>
+              <a:rPr lang="zh-CN" altLang="en-US"/>
+              <a:t>。要素抽取用 </a:t>
+            </a:r>
+            <a:r>
+              <a:rPr lang="en-US" altLang="zh-CN"/>
+              <a:t>JSON Schema </a:t>
+            </a:r>
+            <a:r>
+              <a:rPr lang="zh-CN" altLang="en-US"/>
+              <a:t>约束加 </a:t>
+            </a:r>
+            <a:r>
+              <a:rPr lang="en-US" altLang="zh-CN"/>
+              <a:t>Few-shot</a:t>
+            </a:r>
+            <a:r>
+              <a:rPr lang="zh-CN" altLang="en-US"/>
+              <a:t>，抽取双方、金额、日期、期限、争议解决等字段，长合同分块并行、按非空优先合并，加权综合 </a:t>
+            </a:r>
+            <a:r>
+              <a:rPr lang="en-US" altLang="zh-CN"/>
+              <a:t>F1 </a:t>
+            </a:r>
+            <a:r>
+              <a:rPr lang="zh-CN" altLang="en-US"/>
+              <a:t>达到 </a:t>
+            </a:r>
+            <a:r>
+              <a:rPr lang="en-US" altLang="zh-CN"/>
+              <a:t>93.7%</a:t>
+            </a:r>
+            <a:r>
+              <a:rPr lang="zh-CN" altLang="en-US"/>
+              <a:t>。右边这个位置我放合同详情页的截图，展示要素抽取的结构化结果。</a:t>
+            </a:r>
+            <a:endParaRPr/>
           </a:p>
         </p:txBody>
       </p:sp>
@@ -1636,7 +3277,7 @@
           <a:p>
             <a:fld id="{5BCAD085-E8A6-8845-BD4E-CB4CCA059FC4}" type="datetimeFigureOut">
               <a:rPr lang="en-US" smtClean="0"/>
-              <a:t>9/15/2026</a:t>
+              <a:t>9/19/2026</a:t>
             </a:fld>
             <a:endParaRPr lang="en-US"/>
           </a:p>
@@ -1804,7 +3445,7 @@
           <a:p>
             <a:fld id="{5BCAD085-E8A6-8845-BD4E-CB4CCA059FC4}" type="datetimeFigureOut">
               <a:rPr lang="en-US" smtClean="0"/>
-              <a:t>9/15/2026</a:t>
+              <a:t>9/19/2026</a:t>
             </a:fld>
             <a:endParaRPr lang="en-US"/>
           </a:p>
@@ -1982,7 +3623,7 @@
           <a:p>
             <a:fld id="{5BCAD085-E8A6-8845-BD4E-CB4CCA059FC4}" type="datetimeFigureOut">
               <a:rPr lang="en-US" smtClean="0"/>
-              <a:t>9/15/2026</a:t>
+              <a:t>9/19/2026</a:t>
             </a:fld>
             <a:endParaRPr lang="en-US"/>
           </a:p>
@@ -2150,7 +3791,7 @@
           <a:p>
             <a:fld id="{5BCAD085-E8A6-8845-BD4E-CB4CCA059FC4}" type="datetimeFigureOut">
               <a:rPr lang="en-US" smtClean="0"/>
-              <a:t>9/15/2026</a:t>
+              <a:t>9/19/2026</a:t>
             </a:fld>
             <a:endParaRPr lang="en-US"/>
           </a:p>
@@ -2395,7 +4036,7 @@
           <a:p>
             <a:fld id="{5BCAD085-E8A6-8845-BD4E-CB4CCA059FC4}" type="datetimeFigureOut">
               <a:rPr lang="en-US" smtClean="0"/>
-              <a:t>9/15/2026</a:t>
+              <a:t>9/19/2026</a:t>
             </a:fld>
             <a:endParaRPr lang="en-US"/>
           </a:p>
@@ -2680,7 +4321,7 @@
           <a:p>
             <a:fld id="{5BCAD085-E8A6-8845-BD4E-CB4CCA059FC4}" type="datetimeFigureOut">
               <a:rPr lang="en-US" smtClean="0"/>
-              <a:t>9/15/2026</a:t>
+              <a:t>9/19/2026</a:t>
             </a:fld>
             <a:endParaRPr lang="en-US"/>
           </a:p>
@@ -3099,7 +4740,7 @@
           <a:p>
             <a:fld id="{5BCAD085-E8A6-8845-BD4E-CB4CCA059FC4}" type="datetimeFigureOut">
               <a:rPr lang="en-US" smtClean="0"/>
-              <a:t>9/15/2026</a:t>
+              <a:t>9/19/2026</a:t>
             </a:fld>
             <a:endParaRPr lang="en-US"/>
           </a:p>
@@ -3216,7 +4857,7 @@
           <a:p>
             <a:fld id="{5BCAD085-E8A6-8845-BD4E-CB4CCA059FC4}" type="datetimeFigureOut">
               <a:rPr lang="en-US" smtClean="0"/>
-              <a:t>9/15/2026</a:t>
+              <a:t>9/19/2026</a:t>
             </a:fld>
             <a:endParaRPr lang="en-US"/>
           </a:p>
@@ -3311,7 +4952,7 @@
           <a:p>
             <a:fld id="{5BCAD085-E8A6-8845-BD4E-CB4CCA059FC4}" type="datetimeFigureOut">
               <a:rPr lang="en-US" smtClean="0"/>
-              <a:t>9/15/2026</a:t>
+              <a:t>9/19/2026</a:t>
             </a:fld>
             <a:endParaRPr lang="en-US"/>
           </a:p>
@@ -3586,7 +5227,7 @@
           <a:p>
             <a:fld id="{5BCAD085-E8A6-8845-BD4E-CB4CCA059FC4}" type="datetimeFigureOut">
               <a:rPr lang="en-US" smtClean="0"/>
-              <a:t>9/15/2026</a:t>
+              <a:t>9/19/2026</a:t>
             </a:fld>
             <a:endParaRPr lang="en-US"/>
           </a:p>
@@ -3838,7 +5479,7 @@
           <a:p>
             <a:fld id="{5BCAD085-E8A6-8845-BD4E-CB4CCA059FC4}" type="datetimeFigureOut">
               <a:rPr lang="en-US" smtClean="0"/>
-              <a:t>9/15/2026</a:t>
+              <a:t>9/19/2026</a:t>
             </a:fld>
             <a:endParaRPr lang="en-US"/>
           </a:p>
@@ -4049,7 +5690,7 @@
           <a:p>
             <a:fld id="{5BCAD085-E8A6-8845-BD4E-CB4CCA059FC4}" type="datetimeFigureOut">
               <a:rPr lang="en-US" smtClean="0"/>
-              <a:t>9/15/2026</a:t>
+              <a:t>9/19/2026</a:t>
             </a:fld>
             <a:endParaRPr lang="en-US"/>
           </a:p>
@@ -4852,7 +6493,7 @@
                 <a:ea typeface="微软雅黑"/>
                 <a:cs typeface="微软雅黑"/>
               </a:rPr>
-              <a:t>参赛团队：海底汪汪队     ·     技术栈：Vue 3 + FastAPI + DeepSeek + ChromaDB</a:t>
+              <a:t>参赛团队：海底喵喵队     ·     技术栈：Vue 3 + FastAPI + DeepSeek + ChromaDB</a:t>
             </a:r>
           </a:p>
           <a:p>
@@ -6597,7 +8238,7 @@
                 <a:ea typeface="微软雅黑"/>
                 <a:cs typeface="微软雅黑"/>
               </a:rPr>
-              <a:t>SmartContract Auditor · 海底汪汪队</a:t>
+              <a:t>SmartContract Auditor · 海底喵喵队</a:t>
             </a:r>
           </a:p>
         </p:txBody>
@@ -7660,7 +9301,7 @@
                 <a:ea typeface="微软雅黑"/>
                 <a:cs typeface="微软雅黑"/>
               </a:rPr>
-              <a:t>SmartContract Auditor · 海底汪汪队</a:t>
+              <a:t>SmartContract Auditor · 海底喵喵队</a:t>
             </a:r>
           </a:p>
         </p:txBody>
@@ -8312,7 +9953,7 @@
         <p:spPr>
           <a:xfrm>
             <a:off x="640080" y="4160520"/>
-            <a:ext cx="5394960" cy="1554480"/>
+            <a:ext cx="5394960" cy="1833835"/>
           </a:xfrm>
           <a:prstGeom prst="rect">
             <a:avLst/>
@@ -8331,7 +9972,7 @@
               </a:spcAft>
             </a:pPr>
             <a:r>
-              <a:rPr sz="1250" b="1" i="0">
+              <a:rPr lang="zh-CN" altLang="en-US" sz="1250" b="1" i="0">
                 <a:solidFill>
                   <a:srgbClr val="2B2F38"/>
                 </a:solidFill>
@@ -8339,20 +9980,17 @@
                 <a:ea typeface="微软雅黑"/>
                 <a:cs typeface="微软雅黑"/>
               </a:rPr>
-              <a:t>闭环定位</a:t>
+              <a:t>闭环定位：</a:t>
             </a:r>
           </a:p>
           <a:p>
             <a:pPr algn="l">
-              <a:lnSpc>
-                <a:spcPct val="120000"/>
-              </a:lnSpc>
               <a:spcAft>
                 <a:spcPts val="400"/>
               </a:spcAft>
             </a:pPr>
             <a:r>
-              <a:rPr sz="1150" b="0" i="0">
+              <a:rPr lang="zh-CN" altLang="en-US" sz="1250" b="1" i="0">
                 <a:solidFill>
                   <a:srgbClr val="2B2F38"/>
                 </a:solidFill>
@@ -8360,26 +9998,243 @@
                 <a:ea typeface="微软雅黑"/>
                 <a:cs typeface="微软雅黑"/>
               </a:rPr>
-              <a:t>反馈以结构化形式存储，积累 ≥50 条后由管理员导出（CSV/JSON），用于更新 Prompt 示例、调整规则阈值、补充风险词典、更新向量库。</a:t>
+              <a:t>反馈先入 </a:t>
+            </a:r>
+            <a:r>
+              <a:rPr lang="en-US" sz="1250" b="1" i="0">
+                <a:solidFill>
+                  <a:srgbClr val="2B2F38"/>
+                </a:solidFill>
+                <a:latin typeface="微软雅黑"/>
+                <a:ea typeface="微软雅黑"/>
+                <a:cs typeface="微软雅黑"/>
+              </a:rPr>
+              <a:t>feedback_logs </a:t>
+            </a:r>
+            <a:r>
+              <a:rPr lang="zh-CN" altLang="en-US" sz="1250" b="1" i="0">
+                <a:solidFill>
+                  <a:srgbClr val="2B2F38"/>
+                </a:solidFill>
+                <a:latin typeface="微软雅黑"/>
+                <a:ea typeface="微软雅黑"/>
+                <a:cs typeface="微软雅黑"/>
+              </a:rPr>
+              <a:t>留痕（</a:t>
+            </a:r>
+            <a:r>
+              <a:rPr lang="en-US" sz="1250" b="1" i="0">
+                <a:solidFill>
+                  <a:srgbClr val="2B2F38"/>
+                </a:solidFill>
+                <a:latin typeface="微软雅黑"/>
+                <a:ea typeface="微软雅黑"/>
+                <a:cs typeface="微软雅黑"/>
+              </a:rPr>
+              <a:t>pending）→ reviewer </a:t>
+            </a:r>
+            <a:r>
+              <a:rPr lang="zh-CN" altLang="en-US" sz="1250" b="1" i="0">
+                <a:solidFill>
+                  <a:srgbClr val="2B2F38"/>
+                </a:solidFill>
+                <a:latin typeface="微软雅黑"/>
+                <a:ea typeface="微软雅黑"/>
+                <a:cs typeface="微软雅黑"/>
+              </a:rPr>
+              <a:t>审核 → </a:t>
+            </a:r>
+            <a:r>
+              <a:rPr lang="en-US" sz="1250" b="1" i="0">
+                <a:solidFill>
+                  <a:srgbClr val="2B2F38"/>
+                </a:solidFill>
+                <a:latin typeface="微软雅黑"/>
+                <a:ea typeface="微软雅黑"/>
+                <a:cs typeface="微软雅黑"/>
+              </a:rPr>
+              <a:t>admin </a:t>
+            </a:r>
+            <a:r>
+              <a:rPr lang="zh-CN" altLang="en-US" sz="1250" b="1" i="0">
+                <a:solidFill>
+                  <a:srgbClr val="2B2F38"/>
+                </a:solidFill>
+                <a:latin typeface="微软雅黑"/>
+                <a:ea typeface="微软雅黑"/>
+                <a:cs typeface="微软雅黑"/>
+              </a:rPr>
+              <a:t>批准 → 沉淀为 </a:t>
+            </a:r>
+            <a:r>
+              <a:rPr lang="en-US" sz="1250" b="1" i="0">
+                <a:solidFill>
+                  <a:srgbClr val="2B2F38"/>
+                </a:solidFill>
+                <a:latin typeface="微软雅黑"/>
+                <a:ea typeface="微软雅黑"/>
+                <a:cs typeface="微软雅黑"/>
+              </a:rPr>
+              <a:t>feedback_experiences </a:t>
+            </a:r>
+            <a:r>
+              <a:rPr lang="zh-CN" altLang="en-US" sz="1250" b="1" i="0">
+                <a:solidFill>
+                  <a:srgbClr val="2B2F38"/>
+                </a:solidFill>
+                <a:latin typeface="微软雅黑"/>
+                <a:ea typeface="微软雅黑"/>
+                <a:cs typeface="微软雅黑"/>
+              </a:rPr>
+              <a:t>风险经验 → 进入独立向量库（</a:t>
+            </a:r>
+            <a:r>
+              <a:rPr lang="en-US" sz="1250" b="1" i="0">
+                <a:solidFill>
+                  <a:srgbClr val="2B2F38"/>
+                </a:solidFill>
+                <a:latin typeface="微软雅黑"/>
+                <a:ea typeface="微软雅黑"/>
+                <a:cs typeface="微软雅黑"/>
+              </a:rPr>
+              <a:t>Chroma: feedback_experiences）→ </a:t>
+            </a:r>
+            <a:r>
+              <a:rPr lang="zh-CN" altLang="en-US" sz="1250" b="1" i="0">
+                <a:solidFill>
+                  <a:srgbClr val="2B2F38"/>
+                </a:solidFill>
+                <a:latin typeface="微软雅黑"/>
+                <a:ea typeface="微软雅黑"/>
+                <a:cs typeface="微软雅黑"/>
+              </a:rPr>
+              <a:t>后续审核检索后作为「历史人工参考」注入证据抽取 </a:t>
+            </a:r>
+            <a:r>
+              <a:rPr lang="en-US" sz="1250" b="1" i="0">
+                <a:solidFill>
+                  <a:srgbClr val="2B2F38"/>
+                </a:solidFill>
+                <a:latin typeface="微软雅黑"/>
+                <a:ea typeface="微软雅黑"/>
+                <a:cs typeface="微软雅黑"/>
+              </a:rPr>
+              <a:t>prompt，</a:t>
+            </a:r>
+            <a:r>
+              <a:rPr lang="zh-CN" altLang="en-US" sz="1250" b="1" i="0">
+                <a:solidFill>
+                  <a:srgbClr val="2B2F38"/>
+                </a:solidFill>
+                <a:latin typeface="微软雅黑"/>
+                <a:ea typeface="微软雅黑"/>
+                <a:cs typeface="微软雅黑"/>
+              </a:rPr>
+              <a:t>并在审核记录 </a:t>
+            </a:r>
+            <a:r>
+              <a:rPr lang="en-US" sz="1250" b="1" i="0">
+                <a:solidFill>
+                  <a:srgbClr val="2B2F38"/>
+                </a:solidFill>
+                <a:latin typeface="微软雅黑"/>
+                <a:ea typeface="微软雅黑"/>
+                <a:cs typeface="微软雅黑"/>
+              </a:rPr>
+              <a:t>learning_context </a:t>
+            </a:r>
+            <a:r>
+              <a:rPr lang="zh-CN" altLang="en-US" sz="1250" b="1" i="0">
+                <a:solidFill>
+                  <a:srgbClr val="2B2F38"/>
+                </a:solidFill>
+                <a:latin typeface="微软雅黑"/>
+                <a:ea typeface="微软雅黑"/>
+                <a:cs typeface="微软雅黑"/>
+              </a:rPr>
+              <a:t>留痕；经验可撤销并从向量库精确回退。</a:t>
             </a:r>
           </a:p>
           <a:p>
             <a:pPr algn="l">
-              <a:lnSpc>
-                <a:spcPct val="120000"/>
-              </a:lnSpc>
+              <a:spcAft>
+                <a:spcPts val="400"/>
+              </a:spcAft>
             </a:pPr>
             <a:r>
-              <a:rPr sz="1150" b="0" i="1">
-                <a:solidFill>
-                  <a:srgbClr val="667085"/>
-                </a:solidFill>
-                <a:latin typeface="微软雅黑"/>
-                <a:ea typeface="微软雅黑"/>
-                <a:cs typeface="微软雅黑"/>
-              </a:rPr>
-              <a:t>法律审核要求结果稳定可追溯，故反馈不即时生效，而是版本化沉淀、支持回滚。</a:t>
-            </a:r>
+              <a:rPr lang="en-US" altLang="zh-CN" sz="1250" b="1" i="0">
+                <a:solidFill>
+                  <a:srgbClr val="2B2F38"/>
+                </a:solidFill>
+                <a:latin typeface="微软雅黑"/>
+                <a:ea typeface="微软雅黑"/>
+                <a:cs typeface="微软雅黑"/>
+              </a:rPr>
+              <a:t>※ </a:t>
+            </a:r>
+            <a:r>
+              <a:rPr lang="zh-CN" altLang="en-US" sz="1250" b="1" i="0">
+                <a:solidFill>
+                  <a:srgbClr val="2B2F38"/>
+                </a:solidFill>
+                <a:latin typeface="微软雅黑"/>
+                <a:ea typeface="微软雅黑"/>
+                <a:cs typeface="微软雅黑"/>
+              </a:rPr>
+              <a:t>这不是模型参数微调（不训练、不改权重、不改规则），风险最终裁决仍由代码确定性完成；</a:t>
+            </a:r>
+            <a:r>
+              <a:rPr lang="en-US" sz="1250" b="1" i="0">
+                <a:solidFill>
+                  <a:srgbClr val="2B2F38"/>
+                </a:solidFill>
+                <a:latin typeface="微软雅黑"/>
+                <a:ea typeface="微软雅黑"/>
+                <a:cs typeface="微软雅黑"/>
+              </a:rPr>
+              <a:t>Feedback RAG </a:t>
+            </a:r>
+            <a:r>
+              <a:rPr lang="zh-CN" altLang="en-US" sz="1250" b="1" i="0">
+                <a:solidFill>
+                  <a:srgbClr val="2B2F38"/>
+                </a:solidFill>
+                <a:latin typeface="微软雅黑"/>
+                <a:ea typeface="微软雅黑"/>
+                <a:cs typeface="微软雅黑"/>
+              </a:rPr>
+              <a:t>默认关闭，当前正式库中反馈数据为 </a:t>
+            </a:r>
+            <a:r>
+              <a:rPr lang="en-US" altLang="zh-CN" sz="1250" b="1" i="0">
+                <a:solidFill>
+                  <a:srgbClr val="2B2F38"/>
+                </a:solidFill>
+                <a:latin typeface="微软雅黑"/>
+                <a:ea typeface="微软雅黑"/>
+                <a:cs typeface="微软雅黑"/>
+              </a:rPr>
+              <a:t>0 </a:t>
+            </a:r>
+            <a:r>
+              <a:rPr lang="zh-CN" altLang="en-US" sz="1250" b="1" i="0">
+                <a:solidFill>
+                  <a:srgbClr val="2B2F38"/>
+                </a:solidFill>
+                <a:latin typeface="微软雅黑"/>
+                <a:ea typeface="微软雅黑"/>
+                <a:cs typeface="微软雅黑"/>
+              </a:rPr>
+              <a:t>条。</a:t>
+            </a:r>
+            <a:endParaRPr sz="1150" b="0" i="1">
+              <a:solidFill>
+                <a:srgbClr val="667085"/>
+              </a:solidFill>
+              <a:latin typeface="微软雅黑"/>
+              <a:ea typeface="微软雅黑"/>
+              <a:cs typeface="微软雅黑"/>
+            </a:endParaRPr>
           </a:p>
         </p:txBody>
       </p:sp>
@@ -8921,7 +10776,7 @@
         <p:spPr>
           <a:xfrm>
             <a:off x="6263640" y="5074920"/>
-            <a:ext cx="5303520" cy="457200"/>
+            <a:ext cx="5303520" cy="391261"/>
           </a:xfrm>
           <a:prstGeom prst="rect">
             <a:avLst/>
@@ -8940,7 +10795,7 @@
               </a:lnSpc>
             </a:pPr>
             <a:r>
-              <a:rPr sz="1150" b="1" i="0">
+              <a:rPr lang="zh-CN" altLang="en-US" sz="1150" b="1" i="0">
                 <a:solidFill>
                   <a:srgbClr val="16A34A"/>
                 </a:solidFill>
@@ -8948,8 +10803,60 @@
                 <a:ea typeface="微软雅黑"/>
                 <a:cs typeface="微软雅黑"/>
               </a:rPr>
-              <a:t>输出 HTML 在线预览，风险热力图绿→黄→橙→红映射每页风险密度</a:t>
-            </a:r>
+              <a:t>输出 </a:t>
+            </a:r>
+            <a:r>
+              <a:rPr lang="en-US" altLang="zh-CN" sz="1150" b="1" i="0">
+                <a:solidFill>
+                  <a:srgbClr val="16A34A"/>
+                </a:solidFill>
+                <a:latin typeface="微软雅黑"/>
+                <a:ea typeface="微软雅黑"/>
+                <a:cs typeface="微软雅黑"/>
+              </a:rPr>
+              <a:t>HTML </a:t>
+            </a:r>
+            <a:r>
+              <a:rPr lang="zh-CN" altLang="en-US" sz="1150" b="1" i="0">
+                <a:solidFill>
+                  <a:srgbClr val="16A34A"/>
+                </a:solidFill>
+                <a:latin typeface="微软雅黑"/>
+                <a:ea typeface="微软雅黑"/>
+                <a:cs typeface="微软雅黑"/>
+              </a:rPr>
+              <a:t>在线预览；风险热力图为整篇风险等级分布（</a:t>
+            </a:r>
+            <a:r>
+              <a:rPr lang="en-US" altLang="zh-CN" sz="1150" b="1" i="0">
+                <a:solidFill>
+                  <a:srgbClr val="16A34A"/>
+                </a:solidFill>
+                <a:latin typeface="微软雅黑"/>
+                <a:ea typeface="微软雅黑"/>
+                <a:cs typeface="微软雅黑"/>
+              </a:rPr>
+              <a:t>high/mid/low </a:t>
+            </a:r>
+            <a:r>
+              <a:rPr lang="zh-CN" altLang="en-US" sz="1150" b="1" i="0">
+                <a:solidFill>
+                  <a:srgbClr val="16A34A"/>
+                </a:solidFill>
+                <a:latin typeface="微软雅黑"/>
+                <a:ea typeface="微软雅黑"/>
+                <a:cs typeface="微软雅黑"/>
+              </a:rPr>
+              <a:t>计数），非逐页密度图</a:t>
+            </a:r>
+            <a:endParaRPr sz="1150" b="1" i="0">
+              <a:solidFill>
+                <a:srgbClr val="16A34A"/>
+              </a:solidFill>
+              <a:latin typeface="微软雅黑"/>
+              <a:ea typeface="微软雅黑"/>
+              <a:cs typeface="微软雅黑"/>
+            </a:endParaRPr>
           </a:p>
         </p:txBody>
       </p:sp>
@@ -8985,7 +10892,7 @@
                 <a:ea typeface="微软雅黑"/>
                 <a:cs typeface="微软雅黑"/>
               </a:rPr>
-              <a:t>SmartContract Auditor · 海底汪汪队</a:t>
+              <a:t>SmartContract Auditor · 海底喵喵队</a:t>
             </a:r>
           </a:p>
         </p:txBody>
@@ -9376,7 +11283,7 @@
         <p:spPr>
           <a:xfrm>
             <a:off x="868680" y="2057400"/>
-            <a:ext cx="3108960" cy="914400"/>
+            <a:ext cx="3108960" cy="422231"/>
           </a:xfrm>
           <a:prstGeom prst="rect">
             <a:avLst/>
@@ -9395,7 +11302,7 @@
               </a:lnSpc>
             </a:pPr>
             <a:r>
-              <a:rPr sz="1150" b="0" i="0">
+              <a:rPr lang="zh-CN" altLang="en-US" sz="1150" b="0" i="0">
                 <a:solidFill>
                   <a:srgbClr val="2B2F38"/>
                 </a:solidFill>
@@ -9403,8 +11310,126 @@
                 <a:ea typeface="微软雅黑"/>
                 <a:cs typeface="微软雅黑"/>
               </a:rPr>
-              <a:t>上传合同，30 秒出风险热力图，红色区域一眼定位风险</a:t>
-            </a:r>
+              <a:t>上传后自动解析 </a:t>
+            </a:r>
+            <a:r>
+              <a:rPr lang="en-US" altLang="zh-CN" sz="1150" b="0" i="0">
+                <a:solidFill>
+                  <a:srgbClr val="2B2F38"/>
+                </a:solidFill>
+                <a:latin typeface="微软雅黑"/>
+                <a:ea typeface="微软雅黑"/>
+                <a:cs typeface="微软雅黑"/>
+              </a:rPr>
+              <a:t>+ </a:t>
+            </a:r>
+            <a:r>
+              <a:rPr lang="zh-CN" altLang="en-US" sz="1150" b="0" i="0">
+                <a:solidFill>
+                  <a:srgbClr val="2B2F38"/>
+                </a:solidFill>
+                <a:latin typeface="微软雅黑"/>
+                <a:ea typeface="微软雅黑"/>
+                <a:cs typeface="微软雅黑"/>
+              </a:rPr>
+              <a:t>分类 </a:t>
+            </a:r>
+            <a:r>
+              <a:rPr lang="en-US" altLang="zh-CN" sz="1150" b="0" i="0">
+                <a:solidFill>
+                  <a:srgbClr val="2B2F38"/>
+                </a:solidFill>
+                <a:latin typeface="微软雅黑"/>
+                <a:ea typeface="微软雅黑"/>
+                <a:cs typeface="微软雅黑"/>
+              </a:rPr>
+              <a:t>+ </a:t>
+            </a:r>
+            <a:r>
+              <a:rPr lang="zh-CN" altLang="en-US" sz="1150" b="0" i="0">
+                <a:solidFill>
+                  <a:srgbClr val="2B2F38"/>
+                </a:solidFill>
+                <a:latin typeface="微软雅黑"/>
+                <a:ea typeface="微软雅黑"/>
+                <a:cs typeface="微软雅黑"/>
+              </a:rPr>
+              <a:t>要素抽取（本机实测一份 </a:t>
+            </a:r>
+            <a:r>
+              <a:rPr lang="en-US" altLang="zh-CN" sz="1150" b="0" i="0">
+                <a:solidFill>
+                  <a:srgbClr val="2B2F38"/>
+                </a:solidFill>
+                <a:latin typeface="微软雅黑"/>
+                <a:ea typeface="微软雅黑"/>
+                <a:cs typeface="微软雅黑"/>
+              </a:rPr>
+              <a:t>496KB </a:t>
+            </a:r>
+            <a:r>
+              <a:rPr lang="zh-CN" altLang="en-US" sz="1150" b="0" i="0">
+                <a:solidFill>
+                  <a:srgbClr val="2B2F38"/>
+                </a:solidFill>
+                <a:latin typeface="微软雅黑"/>
+                <a:ea typeface="微软雅黑"/>
+                <a:cs typeface="微软雅黑"/>
+              </a:rPr>
+              <a:t>合同约 </a:t>
+            </a:r>
+            <a:r>
+              <a:rPr lang="en-US" altLang="zh-CN" sz="1150" b="0" i="0">
+                <a:solidFill>
+                  <a:srgbClr val="2B2F38"/>
+                </a:solidFill>
+                <a:latin typeface="微软雅黑"/>
+                <a:ea typeface="微软雅黑"/>
+                <a:cs typeface="微软雅黑"/>
+              </a:rPr>
+              <a:t>40 </a:t>
+            </a:r>
+            <a:r>
+              <a:rPr lang="zh-CN" altLang="en-US" sz="1150" b="0" i="0">
+                <a:solidFill>
+                  <a:srgbClr val="2B2F38"/>
+                </a:solidFill>
+                <a:latin typeface="微软雅黑"/>
+                <a:ea typeface="微软雅黑"/>
+                <a:cs typeface="微软雅黑"/>
+              </a:rPr>
+              <a:t>秒，含两次 </a:t>
+            </a:r>
+            <a:r>
+              <a:rPr lang="en-US" altLang="zh-CN" sz="1150" b="0" i="0">
+                <a:solidFill>
+                  <a:srgbClr val="2B2F38"/>
+                </a:solidFill>
+                <a:latin typeface="微软雅黑"/>
+                <a:ea typeface="微软雅黑"/>
+                <a:cs typeface="微软雅黑"/>
+              </a:rPr>
+              <a:t>LLM </a:t>
+            </a:r>
+            <a:r>
+              <a:rPr lang="zh-CN" altLang="en-US" sz="1150" b="0" i="0">
+                <a:solidFill>
+                  <a:srgbClr val="2B2F38"/>
+                </a:solidFill>
+                <a:latin typeface="微软雅黑"/>
+                <a:ea typeface="微软雅黑"/>
+                <a:cs typeface="微软雅黑"/>
+              </a:rPr>
+              <a:t>调用）</a:t>
+            </a:r>
+            <a:endParaRPr sz="1150" b="0" i="0">
+              <a:solidFill>
+                <a:srgbClr val="2B2F38"/>
+              </a:solidFill>
+              <a:latin typeface="微软雅黑"/>
+              <a:ea typeface="微软雅黑"/>
+              <a:cs typeface="微软雅黑"/>
+            </a:endParaRPr>
           </a:p>
         </p:txBody>
       </p:sp>
@@ -9770,164 +11795,6 @@
       </p:sp>
       <p:sp>
         <p:nvSpPr>
-          <p:cNvPr id="18" name="Rounded Rectangle 17"/>
-          <p:cNvSpPr/>
-          <p:nvPr/>
-        </p:nvSpPr>
-        <p:spPr>
-          <a:xfrm>
-            <a:off x="640080" y="3337560"/>
-            <a:ext cx="6583680" cy="2743200"/>
-          </a:xfrm>
-          <a:prstGeom prst="roundRect">
-            <a:avLst>
-              <a:gd name="adj" fmla="val 5000"/>
-            </a:avLst>
-          </a:prstGeom>
-          <a:solidFill>
-            <a:srgbClr val="F8FAFF"/>
-          </a:solidFill>
-          <a:ln w="15240">
-            <a:solidFill>
-              <a:srgbClr val="C7D2F0"/>
-            </a:solidFill>
-            <a:prstDash val="dash"/>
-          </a:ln>
-          <a:effectLst/>
-        </p:spPr>
-        <p:style>
-          <a:lnRef idx="1">
-            <a:schemeClr val="accent1"/>
-          </a:lnRef>
-          <a:fillRef idx="3">
-            <a:schemeClr val="accent1"/>
-          </a:fillRef>
-          <a:effectRef idx="2">
-            <a:schemeClr val="accent1"/>
-          </a:effectRef>
-          <a:fontRef idx="minor">
-            <a:schemeClr val="lt1"/>
-          </a:fontRef>
-        </p:style>
-        <p:txBody>
-          <a:bodyPr wrap="square" lIns="109728" tIns="54864" rIns="109728" bIns="54864" rtlCol="0" anchor="ctr"/>
-          <a:lstStyle/>
-          <a:p>
-            <a:pPr algn="ctr">
-              <a:spcAft>
-                <a:spcPts val="300"/>
-              </a:spcAft>
-            </a:pPr>
-            <a:r>
-              <a:rPr sz="1100" b="1" i="0">
-                <a:solidFill>
-                  <a:srgbClr val="1935C3"/>
-                </a:solidFill>
-                <a:latin typeface="微软雅黑"/>
-                <a:ea typeface="微软雅黑"/>
-                <a:cs typeface="微软雅黑"/>
-              </a:rPr>
-              <a:t>截图占位</a:t>
-            </a:r>
-          </a:p>
-          <a:p>
-            <a:pPr algn="ctr"/>
-            <a:r>
-              <a:rPr sz="1000" b="0" i="0">
-                <a:solidFill>
-                  <a:srgbClr val="667085"/>
-                </a:solidFill>
-                <a:latin typeface="微软雅黑"/>
-                <a:ea typeface="微软雅黑"/>
-                <a:cs typeface="微软雅黑"/>
-              </a:rPr>
-              <a:t>审核报告页：ECharts 风险热力图
-（绿→黄→橙→红 映射每页风险密度）</a:t>
-            </a:r>
-          </a:p>
-        </p:txBody>
-      </p:sp>
-      <p:sp>
-        <p:nvSpPr>
-          <p:cNvPr id="19" name="Rounded Rectangle 18"/>
-          <p:cNvSpPr/>
-          <p:nvPr/>
-        </p:nvSpPr>
-        <p:spPr>
-          <a:xfrm>
-            <a:off x="7406640" y="3337560"/>
-            <a:ext cx="4160520" cy="2743200"/>
-          </a:xfrm>
-          <a:prstGeom prst="roundRect">
-            <a:avLst>
-              <a:gd name="adj" fmla="val 5000"/>
-            </a:avLst>
-          </a:prstGeom>
-          <a:solidFill>
-            <a:srgbClr val="F8FAFF"/>
-          </a:solidFill>
-          <a:ln w="15240">
-            <a:solidFill>
-              <a:srgbClr val="C7D2F0"/>
-            </a:solidFill>
-            <a:prstDash val="dash"/>
-          </a:ln>
-          <a:effectLst/>
-        </p:spPr>
-        <p:style>
-          <a:lnRef idx="1">
-            <a:schemeClr val="accent1"/>
-          </a:lnRef>
-          <a:fillRef idx="3">
-            <a:schemeClr val="accent1"/>
-          </a:fillRef>
-          <a:effectRef idx="2">
-            <a:schemeClr val="accent1"/>
-          </a:effectRef>
-          <a:fontRef idx="minor">
-            <a:schemeClr val="lt1"/>
-          </a:fontRef>
-        </p:style>
-        <p:txBody>
-          <a:bodyPr wrap="square" lIns="109728" tIns="54864" rIns="109728" bIns="54864" rtlCol="0" anchor="ctr"/>
-          <a:lstStyle/>
-          <a:p>
-            <a:pPr algn="ctr">
-              <a:spcAft>
-                <a:spcPts val="300"/>
-              </a:spcAft>
-            </a:pPr>
-            <a:r>
-              <a:rPr sz="1100" b="1" i="0">
-                <a:solidFill>
-                  <a:srgbClr val="1935C3"/>
-                </a:solidFill>
-                <a:latin typeface="微软雅黑"/>
-                <a:ea typeface="微软雅黑"/>
-                <a:cs typeface="微软雅黑"/>
-              </a:rPr>
-              <a:t>截图占位</a:t>
-            </a:r>
-          </a:p>
-          <a:p>
-            <a:pPr algn="ctr"/>
-            <a:r>
-              <a:rPr sz="1000" b="0" i="0">
-                <a:solidFill>
-                  <a:srgbClr val="667085"/>
-                </a:solidFill>
-                <a:latin typeface="微软雅黑"/>
-                <a:ea typeface="微软雅黑"/>
-                <a:cs typeface="微软雅黑"/>
-              </a:rPr>
-              <a:t>审核结果详情：风险条目 → 原文高亮定位
-（左侧风险列表 + 右侧 pdf.js 高亮）</a:t>
-            </a:r>
-          </a:p>
-        </p:txBody>
-      </p:sp>
-      <p:sp>
-        <p:nvSpPr>
           <p:cNvPr id="20" name="TextBox 19"/>
           <p:cNvSpPr txBox="1"/>
           <p:nvPr/>
@@ -9958,7 +11825,7 @@
                 <a:ea typeface="微软雅黑"/>
                 <a:cs typeface="微软雅黑"/>
               </a:rPr>
-              <a:t>SmartContract Auditor · 海底汪汪队</a:t>
+              <a:t>SmartContract Auditor · 海底喵喵队</a:t>
             </a:r>
           </a:p>
         </p:txBody>
@@ -9996,6 +11863,208 @@
                 <a:cs typeface="微软雅黑"/>
               </a:rPr>
               <a:t>13</a:t>
+            </a:r>
+          </a:p>
+        </p:txBody>
+      </p:sp>
+      <p:pic>
+        <p:nvPicPr>
+          <p:cNvPr id="23" name="图片 22">
+            <a:extLst>
+              <a:ext uri="{FF2B5EF4-FFF2-40B4-BE49-F238E27FC236}">
+                <a16:creationId xmlns:a16="http://schemas.microsoft.com/office/drawing/2014/main" id="{E5F81CBE-854F-FAF1-D644-F54E537BAB00}"/>
+              </a:ext>
+            </a:extLst>
+          </p:cNvPr>
+          <p:cNvPicPr>
+            <a:picLocks noChangeAspect="1"/>
+          </p:cNvPicPr>
+          <p:nvPr/>
+        </p:nvPicPr>
+        <p:blipFill>
+          <a:blip r:embed="rId3"/>
+          <a:stretch>
+            <a:fillRect/>
+          </a:stretch>
+        </p:blipFill>
+        <p:spPr>
+          <a:xfrm>
+            <a:off x="762000" y="3175000"/>
+            <a:ext cx="5581952" cy="2705100"/>
+          </a:xfrm>
+          <a:prstGeom prst="rect">
+            <a:avLst/>
+          </a:prstGeom>
+        </p:spPr>
+      </p:pic>
+      <p:sp>
+        <p:nvSpPr>
+          <p:cNvPr id="24" name="文本框 23">
+            <a:extLst>
+              <a:ext uri="{FF2B5EF4-FFF2-40B4-BE49-F238E27FC236}">
+                <a16:creationId xmlns:a16="http://schemas.microsoft.com/office/drawing/2014/main" id="{FD95A72E-6740-806C-0F9D-988EBF5A0A2E}"/>
+              </a:ext>
+            </a:extLst>
+          </p:cNvPr>
+          <p:cNvSpPr txBox="1"/>
+          <p:nvPr/>
+        </p:nvSpPr>
+        <p:spPr>
+          <a:xfrm>
+            <a:off x="762000" y="6121400"/>
+            <a:ext cx="5588000" cy="238527"/>
+          </a:xfrm>
+          <a:prstGeom prst="rect">
+            <a:avLst/>
+          </a:prstGeom>
+          <a:noFill/>
+        </p:spPr>
+        <p:txBody>
+          <a:bodyPr vert="horz" rtlCol="0">
+            <a:spAutoFit/>
+          </a:bodyPr>
+          <a:lstStyle/>
+          <a:p>
+            <a:r>
+              <a:rPr lang="zh-CN" altLang="en-US" sz="950">
+                <a:solidFill>
+                  <a:srgbClr val="808080"/>
+                </a:solidFill>
+              </a:rPr>
+              <a:t>真实截图：审核报告页 </a:t>
+            </a:r>
+            <a:r>
+              <a:rPr lang="en-US" altLang="zh-CN" sz="950">
+                <a:solidFill>
+                  <a:srgbClr val="808080"/>
+                </a:solidFill>
+              </a:rPr>
+              <a:t>· </a:t>
+            </a:r>
+            <a:r>
+              <a:rPr lang="zh-CN" altLang="en-US" sz="950">
+                <a:solidFill>
+                  <a:srgbClr val="808080"/>
+                </a:solidFill>
+              </a:rPr>
+              <a:t>合同信息 </a:t>
+            </a:r>
+            <a:r>
+              <a:rPr lang="en-US" altLang="zh-CN" sz="950">
+                <a:solidFill>
+                  <a:srgbClr val="808080"/>
+                </a:solidFill>
+              </a:rPr>
+              <a:t>/ </a:t>
+            </a:r>
+            <a:r>
+              <a:rPr lang="zh-CN" altLang="en-US" sz="950">
+                <a:solidFill>
+                  <a:srgbClr val="808080"/>
+                </a:solidFill>
+              </a:rPr>
+              <a:t>风险评分 </a:t>
+            </a:r>
+            <a:r>
+              <a:rPr lang="en-US" altLang="zh-CN" sz="950">
+                <a:solidFill>
+                  <a:srgbClr val="808080"/>
+                </a:solidFill>
+              </a:rPr>
+              <a:t>/ </a:t>
+            </a:r>
+            <a:r>
+              <a:rPr lang="zh-CN" altLang="en-US" sz="950">
+                <a:solidFill>
+                  <a:srgbClr val="808080"/>
+                </a:solidFill>
+              </a:rPr>
+              <a:t>风险项</a:t>
+            </a:r>
+          </a:p>
+        </p:txBody>
+      </p:sp>
+      <p:pic>
+        <p:nvPicPr>
+          <p:cNvPr id="26" name="图片 25">
+            <a:extLst>
+              <a:ext uri="{FF2B5EF4-FFF2-40B4-BE49-F238E27FC236}">
+                <a16:creationId xmlns:a16="http://schemas.microsoft.com/office/drawing/2014/main" id="{FE02C555-5E1D-CE33-F86A-1082722CD176}"/>
+              </a:ext>
+            </a:extLst>
+          </p:cNvPr>
+          <p:cNvPicPr>
+            <a:picLocks noChangeAspect="1"/>
+          </p:cNvPicPr>
+          <p:nvPr/>
+        </p:nvPicPr>
+        <p:blipFill>
+          <a:blip r:embed="rId4"/>
+          <a:stretch>
+            <a:fillRect/>
+          </a:stretch>
+        </p:blipFill>
+        <p:spPr>
+          <a:xfrm>
+            <a:off x="6591300" y="3175000"/>
+            <a:ext cx="4839038" cy="2336800"/>
+          </a:xfrm>
+          <a:prstGeom prst="rect">
+            <a:avLst/>
+          </a:prstGeom>
+        </p:spPr>
+      </p:pic>
+      <p:sp>
+        <p:nvSpPr>
+          <p:cNvPr id="27" name="文本框 26">
+            <a:extLst>
+              <a:ext uri="{FF2B5EF4-FFF2-40B4-BE49-F238E27FC236}">
+                <a16:creationId xmlns:a16="http://schemas.microsoft.com/office/drawing/2014/main" id="{7CDE9CBA-045A-1AAE-D757-DB698B9C7741}"/>
+              </a:ext>
+            </a:extLst>
+          </p:cNvPr>
+          <p:cNvSpPr txBox="1"/>
+          <p:nvPr/>
+        </p:nvSpPr>
+        <p:spPr>
+          <a:xfrm>
+            <a:off x="6604000" y="6121400"/>
+            <a:ext cx="4826000" cy="238527"/>
+          </a:xfrm>
+          <a:prstGeom prst="rect">
+            <a:avLst/>
+          </a:prstGeom>
+          <a:noFill/>
+        </p:spPr>
+        <p:txBody>
+          <a:bodyPr vert="horz" rtlCol="0">
+            <a:spAutoFit/>
+          </a:bodyPr>
+          <a:lstStyle/>
+          <a:p>
+            <a:r>
+              <a:rPr lang="zh-CN" altLang="en-US" sz="950">
+                <a:solidFill>
+                  <a:srgbClr val="808080"/>
+                </a:solidFill>
+              </a:rPr>
+              <a:t>真实截图：风险详情 </a:t>
+            </a:r>
+            <a:r>
+              <a:rPr lang="en-US" altLang="zh-CN" sz="950">
+                <a:solidFill>
+                  <a:srgbClr val="808080"/>
+                </a:solidFill>
+              </a:rPr>
+              <a:t>Tab · </a:t>
+            </a:r>
+            <a:r>
+              <a:rPr lang="zh-CN" altLang="en-US" sz="950">
+                <a:solidFill>
+                  <a:srgbClr val="808080"/>
+                </a:solidFill>
+              </a:rPr>
+              <a:t>风险条目与结构化画像</a:t>
             </a:r>
           </a:p>
         </p:txBody>
@@ -10135,8 +12204,8 @@
         </p:nvSpPr>
         <p:spPr>
           <a:xfrm>
-            <a:off x="1170432" y="329184"/>
-            <a:ext cx="8778240" cy="594360"/>
+            <a:off x="1170432" y="210866"/>
+            <a:ext cx="8778240" cy="830997"/>
           </a:xfrm>
           <a:prstGeom prst="rect">
             <a:avLst/>
@@ -10151,7 +12220,7 @@
           <a:p>
             <a:pPr algn="l"/>
             <a:r>
-              <a:rPr sz="2700" b="1" i="0">
+              <a:rPr lang="zh-CN" altLang="en-US" sz="2700" b="1" i="0">
                 <a:solidFill>
                   <a:srgbClr val="1935C3"/>
                 </a:solidFill>
@@ -10159,8 +12228,16 @@
                 <a:ea typeface="微软雅黑"/>
                 <a:cs typeface="微软雅黑"/>
               </a:rPr>
-              <a:t>创新亮点总结：赛题鼓励方向全部落地</a:t>
-            </a:r>
+              <a:t>创新亮点总结：赛题鼓励方向落地情况（已落地与规划项如实区分）</a:t>
+            </a:r>
+            <a:endParaRPr sz="2700" b="1" i="0">
+              <a:solidFill>
+                <a:srgbClr val="1935C3"/>
+              </a:solidFill>
+              <a:latin typeface="微软雅黑"/>
+              <a:ea typeface="微软雅黑"/>
+              <a:cs typeface="微软雅黑"/>
+            </a:endParaRPr>
           </a:p>
         </p:txBody>
       </p:sp>
@@ -10233,7 +12310,7 @@
                 <a:ea typeface="微软雅黑"/>
                 <a:cs typeface="微软雅黑"/>
               </a:rPr>
-              <a:t>赛题第 7 节鼓励的三个创新方向，我们均已实现落地</a:t>
+              <a:t>赛题第 7 节鼓励的三个创新方向：多轮修改、图分析已落地，印章/签名定位为规划项</a:t>
             </a:r>
           </a:p>
         </p:txBody>
@@ -10376,7 +12453,7 @@
         <p:spPr>
           <a:xfrm>
             <a:off x="841247" y="2194560"/>
-            <a:ext cx="3200400" cy="320040"/>
+            <a:ext cx="3200400" cy="176972"/>
           </a:xfrm>
           <a:prstGeom prst="rect">
             <a:avLst/>
@@ -10391,7 +12468,7 @@
           <a:p>
             <a:pPr algn="l"/>
             <a:r>
-              <a:rPr sz="1150" b="1" i="0">
+              <a:rPr lang="en-US" sz="1150" b="1" i="0">
                 <a:solidFill>
                   <a:srgbClr val="E60012"/>
                 </a:solidFill>
@@ -10399,8 +12476,27 @@
                 <a:ea typeface="微软雅黑"/>
                 <a:cs typeface="微软雅黑"/>
               </a:rPr>
-              <a:t>RCBSF 多智能体</a:t>
-            </a:r>
+              <a:t>Leader–Follower </a:t>
+            </a:r>
+            <a:r>
+              <a:rPr lang="zh-CN" altLang="en-US" sz="1150" b="1" i="0">
+                <a:solidFill>
+                  <a:srgbClr val="E60012"/>
+                </a:solidFill>
+                <a:latin typeface="微软雅黑"/>
+                <a:ea typeface="微软雅黑"/>
+                <a:cs typeface="微软雅黑"/>
+              </a:rPr>
+              <a:t>修订流程</a:t>
+            </a:r>
+            <a:endParaRPr sz="1150" b="1" i="0">
+              <a:solidFill>
+                <a:srgbClr val="E60012"/>
+              </a:solidFill>
+              <a:latin typeface="微软雅黑"/>
+              <a:ea typeface="微软雅黑"/>
+              <a:cs typeface="微软雅黑"/>
+            </a:endParaRPr>
           </a:p>
         </p:txBody>
       </p:sp>
@@ -10413,7 +12509,7 @@
         <p:spPr>
           <a:xfrm>
             <a:off x="841247" y="2542032"/>
-            <a:ext cx="3200400" cy="868680"/>
+            <a:ext cx="3200400" cy="592213"/>
           </a:xfrm>
           <a:prstGeom prst="rect">
             <a:avLst/>
@@ -10432,7 +12528,7 @@
               </a:lnSpc>
             </a:pPr>
             <a:r>
-              <a:rPr sz="1100" b="0" i="0">
+              <a:rPr lang="zh-CN" altLang="en-US" sz="1100" b="0" i="0">
                 <a:solidFill>
                   <a:srgbClr val="2B2F38"/>
                 </a:solidFill>
@@ -10440,8 +12536,60 @@
                 <a:ea typeface="微软雅黑"/>
                 <a:cs typeface="微软雅黑"/>
               </a:rPr>
-              <a:t>Leader 生成草案 + Follower 法务审校，自然语言指令修改条款并输出前后对比</a:t>
-            </a:r>
+              <a:t>统一修订会话：</a:t>
+            </a:r>
+            <a:r>
+              <a:rPr lang="en-US" altLang="zh-CN" sz="1100" b="0" i="0">
+                <a:solidFill>
+                  <a:srgbClr val="2B2F38"/>
+                </a:solidFill>
+                <a:latin typeface="微软雅黑"/>
+                <a:ea typeface="微软雅黑"/>
+                <a:cs typeface="微软雅黑"/>
+              </a:rPr>
+              <a:t>Leader </a:t>
+            </a:r>
+            <a:r>
+              <a:rPr lang="zh-CN" altLang="en-US" sz="1100" b="0" i="0">
+                <a:solidFill>
+                  <a:srgbClr val="2B2F38"/>
+                </a:solidFill>
+                <a:latin typeface="微软雅黑"/>
+                <a:ea typeface="微软雅黑"/>
+                <a:cs typeface="微软雅黑"/>
+              </a:rPr>
+              <a:t>生成草案 </a:t>
+            </a:r>
+            <a:r>
+              <a:rPr lang="en-US" altLang="zh-CN" sz="1100" b="0" i="0">
+                <a:solidFill>
+                  <a:srgbClr val="2B2F38"/>
+                </a:solidFill>
+                <a:latin typeface="微软雅黑"/>
+                <a:ea typeface="微软雅黑"/>
+                <a:cs typeface="微软雅黑"/>
+              </a:rPr>
+              <a:t>+ Follower </a:t>
+            </a:r>
+            <a:r>
+              <a:rPr lang="zh-CN" altLang="en-US" sz="1100" b="0" i="0">
+                <a:solidFill>
+                  <a:srgbClr val="2B2F38"/>
+                </a:solidFill>
+                <a:latin typeface="微软雅黑"/>
+                <a:ea typeface="微软雅黑"/>
+                <a:cs typeface="微软雅黑"/>
+              </a:rPr>
+              <a:t>从法务角度审校，自然语言指令改条款并输出前后对比；位置由用户确认、采用态由用户点击</a:t>
+            </a:r>
+            <a:endParaRPr sz="1100" b="0" i="0">
+              <a:solidFill>
+                <a:srgbClr val="2B2F38"/>
+              </a:solidFill>
+              <a:latin typeface="微软雅黑"/>
+              <a:ea typeface="微软雅黑"/>
+              <a:cs typeface="微软雅黑"/>
+            </a:endParaRPr>
           </a:p>
         </p:txBody>
       </p:sp>
@@ -10776,7 +12924,7 @@
                 <a:ea typeface="微软雅黑"/>
                 <a:cs typeface="微软雅黑"/>
               </a:rPr>
-              <a:t>印章/签名区域定位</a:t>
+              <a:t>印章/签名定位（规划项）</a:t>
             </a:r>
           </a:p>
         </p:txBody>
@@ -10790,7 +12938,7 @@
         <p:spPr>
           <a:xfrm>
             <a:off x="8430768" y="2194560"/>
-            <a:ext cx="3200400" cy="320040"/>
+            <a:ext cx="3200400" cy="176972"/>
           </a:xfrm>
           <a:prstGeom prst="rect">
             <a:avLst/>
@@ -10805,7 +12953,7 @@
           <a:p>
             <a:pPr algn="l"/>
             <a:r>
-              <a:rPr sz="1150" b="1" i="0">
+              <a:rPr lang="en-US" sz="1150" b="1" i="0">
                 <a:solidFill>
                   <a:srgbClr val="E60012"/>
                 </a:solidFill>
@@ -10813,8 +12961,16 @@
                 <a:ea typeface="微软雅黑"/>
                 <a:cs typeface="微软雅黑"/>
               </a:rPr>
-              <a:t>PaddleOCR</a:t>
-            </a:r>
+              <a:t>RapidOCR</a:t>
+            </a:r>
+            <a:endParaRPr sz="1150" b="1" i="0">
+              <a:solidFill>
+                <a:srgbClr val="E60012"/>
+              </a:solidFill>
+              <a:latin typeface="微软雅黑"/>
+              <a:ea typeface="微软雅黑"/>
+              <a:cs typeface="微软雅黑"/>
+            </a:endParaRPr>
           </a:p>
         </p:txBody>
       </p:sp>
@@ -10854,7 +13010,7 @@
                 <a:ea typeface="微软雅黑"/>
                 <a:cs typeface="微软雅黑"/>
               </a:rPr>
-              <a:t>文档解析集成 OCR，实现印章/签名的检测与位置标注</a:t>
+              <a:t>文档解析集成 RapidOCR 做文字识别；印章/签名检测为规划项，尚未实现</a:t>
             </a:r>
           </a:p>
         </p:txBody>
@@ -11180,7 +13336,7 @@
         <p:spPr>
           <a:xfrm>
             <a:off x="8229600" y="4892040"/>
-            <a:ext cx="3566160" cy="685800"/>
+            <a:ext cx="3566160" cy="384721"/>
           </a:xfrm>
           <a:prstGeom prst="rect">
             <a:avLst/>
@@ -11199,7 +13355,7 @@
               </a:spcAft>
             </a:pPr>
             <a:r>
-              <a:rPr sz="1250" b="1" i="0">
+              <a:rPr lang="en-US" sz="1250" b="1" i="0">
                 <a:solidFill>
                   <a:srgbClr val="1935C3"/>
                 </a:solidFill>
@@ -11207,22 +13363,49 @@
                 <a:ea typeface="微软雅黑"/>
                 <a:cs typeface="微软雅黑"/>
               </a:rPr>
-              <a:t>RCBSF</a:t>
-            </a:r>
-          </a:p>
-          <a:p>
-            <a:pPr algn="l"/>
-            <a:r>
-              <a:rPr sz="1050" b="0" i="0">
-                <a:solidFill>
-                  <a:srgbClr val="667085"/>
-                </a:solidFill>
-                <a:latin typeface="微软雅黑"/>
-                <a:ea typeface="微软雅黑"/>
-                <a:cs typeface="微软雅黑"/>
-              </a:rPr>
-              <a:t>改条款多智能体 + 5 维约束</a:t>
-            </a:r>
+              <a:t>Leader–Follower / </a:t>
+            </a:r>
+            <a:r>
+              <a:rPr lang="zh-CN" altLang="en-US" sz="1250" b="1" i="0">
+                <a:solidFill>
+                  <a:srgbClr val="1935C3"/>
+                </a:solidFill>
+                <a:latin typeface="微软雅黑"/>
+                <a:ea typeface="微软雅黑"/>
+                <a:cs typeface="微软雅黑"/>
+              </a:rPr>
+              <a:t>条款修订流程 </a:t>
+            </a:r>
+            <a:r>
+              <a:rPr lang="en-US" altLang="zh-CN" sz="1250" b="1" i="0">
+                <a:solidFill>
+                  <a:srgbClr val="1935C3"/>
+                </a:solidFill>
+                <a:latin typeface="微软雅黑"/>
+                <a:ea typeface="微软雅黑"/>
+                <a:cs typeface="微软雅黑"/>
+              </a:rPr>
+              <a:t>+ </a:t>
+            </a:r>
+            <a:r>
+              <a:rPr lang="zh-CN" altLang="en-US" sz="1250" b="1" i="0">
+                <a:solidFill>
+                  <a:srgbClr val="1935C3"/>
+                </a:solidFill>
+                <a:latin typeface="微软雅黑"/>
+                <a:ea typeface="微软雅黑"/>
+                <a:cs typeface="微软雅黑"/>
+              </a:rPr>
+              <a:t>多轮会话与采用态管理</a:t>
+            </a:r>
+            <a:endParaRPr sz="1050" b="0" i="0">
+              <a:solidFill>
+                <a:srgbClr val="667085"/>
+              </a:solidFill>
+              <a:latin typeface="微软雅黑"/>
+              <a:ea typeface="微软雅黑"/>
+              <a:cs typeface="微软雅黑"/>
+            </a:endParaRPr>
           </a:p>
         </p:txBody>
       </p:sp>
@@ -11258,7 +13441,7 @@
                 <a:ea typeface="微软雅黑"/>
                 <a:cs typeface="微软雅黑"/>
               </a:rPr>
-              <a:t>SmartContract Auditor · 海底汪汪队</a:t>
+              <a:t>SmartContract Auditor · 海底喵喵队</a:t>
             </a:r>
           </a:p>
         </p:txBody>
@@ -12131,7 +14314,7 @@
         <p:spPr>
           <a:xfrm>
             <a:off x="960120" y="4023360"/>
-            <a:ext cx="10607040" cy="502920"/>
+            <a:ext cx="10607040" cy="384721"/>
           </a:xfrm>
           <a:prstGeom prst="rect">
             <a:avLst/>
@@ -12146,7 +14329,7 @@
           <a:p>
             <a:pPr algn="l"/>
             <a:r>
-              <a:rPr sz="1250" b="1" i="0">
+              <a:rPr lang="en-US" sz="1250" b="1" i="0">
                 <a:solidFill>
                   <a:srgbClr val="2B2F38"/>
                 </a:solidFill>
@@ -12154,22 +14337,107 @@
                 <a:ea typeface="微软雅黑"/>
                 <a:cs typeface="微软雅黑"/>
               </a:rPr>
-              <a:t>Docker Compose 一键部署：</a:t>
+              <a:t>Docker Compose </a:t>
+            </a:r>
+            <a:r>
+              <a:rPr lang="zh-CN" altLang="en-US" sz="1250" b="1" i="0">
+                <a:solidFill>
+                  <a:srgbClr val="2B2F38"/>
+                </a:solidFill>
+                <a:latin typeface="微软雅黑"/>
+                <a:ea typeface="微软雅黑"/>
+                <a:cs typeface="微软雅黑"/>
+              </a:rPr>
+              <a:t>两服务编排：</a:t>
+            </a:r>
+            <a:r>
+              <a:rPr lang="en-US" sz="1250" b="1" i="0">
+                <a:solidFill>
+                  <a:srgbClr val="2B2F38"/>
+                </a:solidFill>
+                <a:latin typeface="微软雅黑"/>
+                <a:ea typeface="微软雅黑"/>
+                <a:cs typeface="微软雅黑"/>
+              </a:rPr>
+              <a:t>api + web（ChromaDB </a:t>
+            </a:r>
+            <a:r>
+              <a:rPr lang="zh-CN" altLang="en-US" sz="1250" b="1" i="0">
+                <a:solidFill>
+                  <a:srgbClr val="2B2F38"/>
+                </a:solidFill>
+                <a:latin typeface="微软雅黑"/>
+                <a:ea typeface="微软雅黑"/>
+                <a:cs typeface="微软雅黑"/>
+              </a:rPr>
+              <a:t>内嵌后端，无独立容器）</a:t>
             </a:r>
           </a:p>
           <a:p>
             <a:pPr algn="l"/>
             <a:r>
-              <a:rPr sz="1200" b="0" i="0">
-                <a:solidFill>
-                  <a:srgbClr val="667085"/>
-                </a:solidFill>
-                <a:latin typeface="微软雅黑"/>
-                <a:ea typeface="微软雅黑"/>
-                <a:cs typeface="微软雅黑"/>
-              </a:rPr>
-              <a:t>MySQL + ChromaDB + FastAPI + Nginx 四容器，评委 15 分钟可复现</a:t>
-            </a:r>
+              <a:rPr lang="zh-CN" altLang="en-US" sz="1250" b="1" i="0">
+                <a:solidFill>
+                  <a:srgbClr val="2B2F38"/>
+                </a:solidFill>
+                <a:latin typeface="微软雅黑"/>
+                <a:ea typeface="微软雅黑"/>
+                <a:cs typeface="微软雅黑"/>
+              </a:rPr>
+              <a:t>如实说明：配置已完成，但当前开发机无 </a:t>
+            </a:r>
+            <a:r>
+              <a:rPr lang="en-US" sz="1250" b="1" i="0">
+                <a:solidFill>
+                  <a:srgbClr val="2B2F38"/>
+                </a:solidFill>
+                <a:latin typeface="微软雅黑"/>
+                <a:ea typeface="微软雅黑"/>
+                <a:cs typeface="微软雅黑"/>
+              </a:rPr>
+              <a:t>Docker </a:t>
+            </a:r>
+            <a:r>
+              <a:rPr lang="zh-CN" altLang="en-US" sz="1250" b="1" i="0">
+                <a:solidFill>
+                  <a:srgbClr val="2B2F38"/>
+                </a:solidFill>
+                <a:latin typeface="微软雅黑"/>
+                <a:ea typeface="微软雅黑"/>
+                <a:cs typeface="微软雅黑"/>
+              </a:rPr>
+              <a:t>环境，尚未做真实 </a:t>
+            </a:r>
+            <a:r>
+              <a:rPr lang="en-US" sz="1250" b="1" i="0">
+                <a:solidFill>
+                  <a:srgbClr val="2B2F38"/>
+                </a:solidFill>
+                <a:latin typeface="微软雅黑"/>
+                <a:ea typeface="微软雅黑"/>
+                <a:cs typeface="微软雅黑"/>
+              </a:rPr>
+              <a:t>build/up </a:t>
+            </a:r>
+            <a:r>
+              <a:rPr lang="zh-CN" altLang="en-US" sz="1250" b="1" i="0">
+                <a:solidFill>
+                  <a:srgbClr val="2B2F38"/>
+                </a:solidFill>
+                <a:latin typeface="微软雅黑"/>
+                <a:ea typeface="微软雅黑"/>
+                <a:cs typeface="微软雅黑"/>
+              </a:rPr>
+              <a:t>验证</a:t>
+            </a:r>
+            <a:endParaRPr sz="1200" b="0" i="0">
+              <a:solidFill>
+                <a:srgbClr val="667085"/>
+              </a:solidFill>
+              <a:latin typeface="微软雅黑"/>
+              <a:ea typeface="微软雅黑"/>
+              <a:cs typeface="微软雅黑"/>
+            </a:endParaRPr>
           </a:p>
         </p:txBody>
       </p:sp>
@@ -12256,7 +14524,7 @@
                 <a:ea typeface="微软雅黑"/>
                 <a:cs typeface="微软雅黑"/>
               </a:rPr>
-              <a:t>DeepSeek 不可用时切换本地 Qwen2.5-7B，数据不出内网</a:t>
+              <a:t>DeepSeek 不可用时降级为纯规则引擎 fast 模式；本地大模型接入为规划项，尚未实现</a:t>
             </a:r>
           </a:p>
         </p:txBody>
@@ -12381,7 +14649,7 @@
                 <a:ea typeface="微软雅黑"/>
                 <a:cs typeface="微软雅黑"/>
               </a:rPr>
-              <a:t>SmartContract Auditor · 海底汪汪队</a:t>
+              <a:t>SmartContract Auditor · 海底喵喵队</a:t>
             </a:r>
           </a:p>
         </p:txBody>
@@ -13625,7 +15893,7 @@
                 <a:ea typeface="微软雅黑"/>
                 <a:cs typeface="微软雅黑"/>
               </a:rPr>
-              <a:t>SmartContract Auditor · 海底汪汪队</a:t>
+              <a:t>SmartContract Auditor · 海底喵喵队</a:t>
             </a:r>
           </a:p>
         </p:txBody>
@@ -14305,7 +16573,7 @@
         <p:spPr>
           <a:xfrm>
             <a:off x="822960" y="4800600"/>
-            <a:ext cx="10515600" cy="731520"/>
+            <a:ext cx="10515600" cy="288925"/>
           </a:xfrm>
           <a:prstGeom prst="rect">
             <a:avLst/>
@@ -14323,35 +16591,14 @@
                 <a:spcPct val="130000"/>
               </a:lnSpc>
             </a:pPr>
-            <a:r>
-              <a:rPr sz="1600" b="1" i="0">
-                <a:solidFill>
-                  <a:srgbClr val="FFFFFF"/>
-                </a:solidFill>
-                <a:latin typeface="微软雅黑"/>
-                <a:ea typeface="微软雅黑"/>
-                <a:cs typeface="微软雅黑"/>
-              </a:rPr>
-              <a:t>“把法务从逐条比对中解放出来，5 分钟完成一份百页合同的全面审核——</a:t>
-            </a:r>
-          </a:p>
-          <a:p>
-            <a:pPr algn="l">
-              <a:lnSpc>
-                <a:spcPct val="130000"/>
-              </a:lnSpc>
-            </a:pPr>
-            <a:r>
-              <a:rPr sz="1600" b="1" i="0">
-                <a:solidFill>
-                  <a:srgbClr val="FFFFFF"/>
-                </a:solidFill>
-                <a:latin typeface="微软雅黑"/>
-                <a:ea typeface="微软雅黑"/>
-                <a:cs typeface="微软雅黑"/>
-              </a:rPr>
-              <a:t>不只是找风险，更是沉淀企业法务知识资产。”</a:t>
-            </a:r>
+            <a:endParaRPr sz="1600" b="1" i="0">
+              <a:solidFill>
+                <a:srgbClr val="FFFFFF"/>
+              </a:solidFill>
+              <a:latin typeface="微软雅黑"/>
+              <a:ea typeface="微软雅黑"/>
+              <a:cs typeface="微软雅黑"/>
+            </a:endParaRPr>
           </a:p>
         </p:txBody>
       </p:sp>
@@ -15567,7 +17814,7 @@
                 <a:ea typeface="微软雅黑"/>
                 <a:cs typeface="微软雅黑"/>
               </a:rPr>
-              <a:t>SmartContract Auditor · 海底汪汪队</a:t>
+              <a:t>SmartContract Auditor · 海底喵喵队</a:t>
             </a:r>
           </a:p>
         </p:txBody>
@@ -16354,7 +18601,7 @@
               </a:spcAft>
             </a:pPr>
             <a:r>
-              <a:rPr sz="1500" b="1" i="0">
+              <a:rPr lang="zh-CN" altLang="en-US" sz="1500" b="1" i="0">
                 <a:solidFill>
                   <a:srgbClr val="FFFFFF"/>
                 </a:solidFill>
@@ -16362,17 +18609,39 @@
                 <a:ea typeface="微软雅黑"/>
                 <a:cs typeface="微软雅黑"/>
               </a:rPr>
-              <a:t>引入 AI 辅助后</a:t>
+              <a:t>引入 </a:t>
+            </a:r>
+            <a:r>
+              <a:rPr lang="en-US" altLang="zh-CN" sz="1500" b="1" i="0">
+                <a:solidFill>
+                  <a:srgbClr val="FFFFFF"/>
+                </a:solidFill>
+                <a:latin typeface="微软雅黑"/>
+                <a:ea typeface="微软雅黑"/>
+                <a:cs typeface="微软雅黑"/>
+              </a:rPr>
+              <a:t>AI </a:t>
+            </a:r>
+            <a:r>
+              <a:rPr lang="zh-CN" altLang="en-US" sz="1500" b="1" i="0">
+                <a:solidFill>
+                  <a:srgbClr val="FFFFFF"/>
+                </a:solidFill>
+                <a:latin typeface="微软雅黑"/>
+                <a:ea typeface="微软雅黑"/>
+                <a:cs typeface="微软雅黑"/>
+              </a:rPr>
+              <a:t>辅助后</a:t>
             </a:r>
           </a:p>
           <a:p>
             <a:pPr algn="ctr">
               <a:spcAft>
-                <a:spcPts val="600"/>
+                <a:spcPts val="800"/>
               </a:spcAft>
             </a:pPr>
             <a:r>
-              <a:rPr sz="1300" b="0" i="0">
+              <a:rPr lang="zh-CN" altLang="en-US" sz="1500" b="1" i="0">
                 <a:solidFill>
                   <a:srgbClr val="FFFFFF"/>
                 </a:solidFill>
@@ -16380,17 +18649,83 @@
                 <a:ea typeface="微软雅黑"/>
                 <a:cs typeface="微软雅黑"/>
               </a:rPr>
-              <a:t>单份审核时间  2-4 小时  →  5-15 分钟</a:t>
+              <a:t>单份审核耗时（实测）：解析</a:t>
+            </a:r>
+            <a:r>
+              <a:rPr lang="en-US" altLang="zh-CN" sz="1500" b="1" i="0">
+                <a:solidFill>
+                  <a:srgbClr val="FFFFFF"/>
+                </a:solidFill>
+                <a:latin typeface="微软雅黑"/>
+                <a:ea typeface="微软雅黑"/>
+                <a:cs typeface="微软雅黑"/>
+              </a:rPr>
+              <a:t>+</a:t>
+            </a:r>
+            <a:r>
+              <a:rPr lang="zh-CN" altLang="en-US" sz="1500" b="1" i="0">
+                <a:solidFill>
+                  <a:srgbClr val="FFFFFF"/>
+                </a:solidFill>
+                <a:latin typeface="微软雅黑"/>
+                <a:ea typeface="微软雅黑"/>
+                <a:cs typeface="微软雅黑"/>
+              </a:rPr>
+              <a:t>分类</a:t>
+            </a:r>
+            <a:r>
+              <a:rPr lang="en-US" altLang="zh-CN" sz="1500" b="1" i="0">
+                <a:solidFill>
+                  <a:srgbClr val="FFFFFF"/>
+                </a:solidFill>
+                <a:latin typeface="微软雅黑"/>
+                <a:ea typeface="微软雅黑"/>
+                <a:cs typeface="微软雅黑"/>
+              </a:rPr>
+              <a:t>+</a:t>
+            </a:r>
+            <a:r>
+              <a:rPr lang="zh-CN" altLang="en-US" sz="1500" b="1" i="0">
+                <a:solidFill>
+                  <a:srgbClr val="FFFFFF"/>
+                </a:solidFill>
+                <a:latin typeface="微软雅黑"/>
+                <a:ea typeface="微软雅黑"/>
+                <a:cs typeface="微软雅黑"/>
+              </a:rPr>
+              <a:t>要素约 </a:t>
+            </a:r>
+            <a:r>
+              <a:rPr lang="en-US" altLang="zh-CN" sz="1500" b="1" i="0">
+                <a:solidFill>
+                  <a:srgbClr val="FFFFFF"/>
+                </a:solidFill>
+                <a:latin typeface="微软雅黑"/>
+                <a:ea typeface="微软雅黑"/>
+                <a:cs typeface="微软雅黑"/>
+              </a:rPr>
+              <a:t>40 </a:t>
+            </a:r>
+            <a:r>
+              <a:rPr lang="zh-CN" altLang="en-US" sz="1500" b="1" i="0">
+                <a:solidFill>
+                  <a:srgbClr val="FFFFFF"/>
+                </a:solidFill>
+                <a:latin typeface="微软雅黑"/>
+                <a:ea typeface="微软雅黑"/>
+                <a:cs typeface="微软雅黑"/>
+              </a:rPr>
+              <a:t>秒，精细审核按合同长度分钟级</a:t>
             </a:r>
           </a:p>
           <a:p>
             <a:pPr algn="ctr">
               <a:spcAft>
-                <a:spcPts val="600"/>
+                <a:spcPts val="800"/>
               </a:spcAft>
             </a:pPr>
             <a:r>
-              <a:rPr sz="1300" b="0" i="0">
+              <a:rPr lang="zh-CN" altLang="en-US" sz="1500" b="1" i="0">
                 <a:solidFill>
                   <a:srgbClr val="FFFFFF"/>
                 </a:solidFill>
@@ -16398,17 +18733,17 @@
                 <a:ea typeface="微软雅黑"/>
                 <a:cs typeface="微软雅黑"/>
               </a:rPr>
-              <a:t>风险遗漏率  ~15%  →  &lt;5%</a:t>
+              <a:t>审核结论：每条附证据链、法条依据、修改建议，可复述、可追溯</a:t>
             </a:r>
           </a:p>
           <a:p>
             <a:pPr algn="ctr">
               <a:spcAft>
-                <a:spcPts val="600"/>
+                <a:spcPts val="800"/>
               </a:spcAft>
             </a:pPr>
             <a:r>
-              <a:rPr sz="1300" b="0" i="0">
+              <a:rPr lang="zh-CN" altLang="en-US" sz="1500" b="1" i="0">
                 <a:solidFill>
                   <a:srgbClr val="FFFFFF"/>
                 </a:solidFill>
@@ -16416,22 +18751,16 @@
                 <a:ea typeface="微软雅黑"/>
                 <a:cs typeface="微软雅黑"/>
               </a:rPr>
-              <a:t>法务知识  →  系统沉淀、可搜索</a:t>
-            </a:r>
-          </a:p>
-          <a:p>
-            <a:pPr algn="ctr"/>
-            <a:r>
-              <a:rPr sz="1300" b="0" i="0">
-                <a:solidFill>
-                  <a:srgbClr val="FFFFFF"/>
-                </a:solidFill>
-                <a:latin typeface="微软雅黑"/>
-                <a:ea typeface="微软雅黑"/>
-                <a:cs typeface="微软雅黑"/>
-              </a:rPr>
-              <a:t>单份 API 成本  &lt; 0.5 元</a:t>
-            </a:r>
+              <a:t>知识沉淀：反馈经验留痕并可按流程沉淀入库（当前尚无真实反馈数据）</a:t>
+            </a:r>
+            <a:endParaRPr sz="1300" b="0" i="0">
+              <a:solidFill>
+                <a:srgbClr val="FFFFFF"/>
+              </a:solidFill>
+              <a:latin typeface="微软雅黑"/>
+              <a:ea typeface="微软雅黑"/>
+              <a:cs typeface="微软雅黑"/>
+            </a:endParaRPr>
           </a:p>
         </p:txBody>
       </p:sp>
@@ -16444,7 +18773,7 @@
         <p:spPr>
           <a:xfrm>
             <a:off x="6492240" y="3794760"/>
-            <a:ext cx="5029200" cy="1280160"/>
+            <a:ext cx="5029200" cy="475451"/>
           </a:xfrm>
           <a:prstGeom prst="rect">
             <a:avLst/>
@@ -16463,7 +18792,7 @@
               </a:spcAft>
             </a:pPr>
             <a:r>
-              <a:rPr sz="1300" b="1" i="0">
+              <a:rPr lang="zh-CN" altLang="en-US" sz="1300" b="1" i="0">
                 <a:solidFill>
                   <a:srgbClr val="1935C3"/>
                 </a:solidFill>
@@ -16480,17 +18809,14 @@
                 <a:spcPct val="120000"/>
               </a:lnSpc>
             </a:pPr>
-            <a:r>
-              <a:rPr sz="1250" b="0" i="1">
-                <a:solidFill>
-                  <a:srgbClr val="2B2F38"/>
-                </a:solidFill>
-                <a:latin typeface="微软雅黑"/>
-                <a:ea typeface="微软雅黑"/>
-                <a:cs typeface="微软雅黑"/>
-              </a:rPr>
-              <a:t>“把法务从逐条比对中解放出来，5 分钟完成一份百页合同的全面审核——不只是找风险，更是沉淀企业法务知识资产。”</a:t>
-            </a:r>
+            <a:endParaRPr sz="1250" b="0" i="1">
+              <a:solidFill>
+                <a:srgbClr val="2B2F38"/>
+              </a:solidFill>
+              <a:latin typeface="微软雅黑"/>
+              <a:ea typeface="微软雅黑"/>
+              <a:cs typeface="微软雅黑"/>
+            </a:endParaRPr>
           </a:p>
         </p:txBody>
       </p:sp>
@@ -16526,7 +18852,7 @@
                 <a:ea typeface="微软雅黑"/>
                 <a:cs typeface="微软雅黑"/>
               </a:rPr>
-              <a:t>SmartContract Auditor · 海底汪汪队</a:t>
+              <a:t>SmartContract Auditor · 海底喵喵队</a:t>
             </a:r>
           </a:p>
         </p:txBody>
@@ -18248,7 +20574,7 @@
                 <a:ea typeface="微软雅黑"/>
                 <a:cs typeface="微软雅黑"/>
               </a:rPr>
-              <a:t>SmartContract Auditor · 海底汪汪队</a:t>
+              <a:t>SmartContract Auditor · 海底喵喵队</a:t>
             </a:r>
           </a:p>
         </p:txBody>
@@ -19349,7 +21675,7 @@
         <p:spPr>
           <a:xfrm>
             <a:off x="960120" y="5422392"/>
-            <a:ext cx="7589520" cy="320040"/>
+            <a:ext cx="7589520" cy="353943"/>
           </a:xfrm>
           <a:prstGeom prst="rect">
             <a:avLst/>
@@ -19364,7 +21690,7 @@
           <a:p>
             <a:pPr algn="l"/>
             <a:r>
-              <a:rPr sz="1150" b="1" i="0">
+              <a:rPr lang="en-US" altLang="zh-CN" sz="1150" b="1" i="0">
                 <a:solidFill>
                   <a:srgbClr val="2B2F38"/>
                 </a:solidFill>
@@ -19372,8 +21698,118 @@
                 <a:ea typeface="微软雅黑"/>
                 <a:cs typeface="微软雅黑"/>
               </a:rPr>
-              <a:t>MySQL 8.0 / SQLite + ChromaDB + 文件系统</a:t>
-            </a:r>
+              <a:t>SQLite</a:t>
+            </a:r>
+            <a:r>
+              <a:rPr lang="zh-CN" altLang="en-US" sz="1150" b="1" i="0">
+                <a:solidFill>
+                  <a:srgbClr val="2B2F38"/>
+                </a:solidFill>
+                <a:latin typeface="微软雅黑"/>
+                <a:ea typeface="微软雅黑"/>
+                <a:cs typeface="微软雅黑"/>
+              </a:rPr>
+              <a:t>（交付默认，</a:t>
+            </a:r>
+            <a:r>
+              <a:rPr lang="en-US" altLang="zh-CN" sz="1150" b="1" i="0">
+                <a:solidFill>
+                  <a:srgbClr val="2B2F38"/>
+                </a:solidFill>
+                <a:latin typeface="微软雅黑"/>
+                <a:ea typeface="微软雅黑"/>
+                <a:cs typeface="微软雅黑"/>
+              </a:rPr>
+              <a:t>WAL </a:t>
+            </a:r>
+            <a:r>
+              <a:rPr lang="zh-CN" altLang="en-US" sz="1150" b="1" i="0">
+                <a:solidFill>
+                  <a:srgbClr val="2B2F38"/>
+                </a:solidFill>
+                <a:latin typeface="微软雅黑"/>
+                <a:ea typeface="微软雅黑"/>
+                <a:cs typeface="微软雅黑"/>
+              </a:rPr>
+              <a:t>模式）</a:t>
+            </a:r>
+            <a:r>
+              <a:rPr lang="en-US" altLang="zh-CN" sz="1150" b="1" i="0">
+                <a:solidFill>
+                  <a:srgbClr val="2B2F38"/>
+                </a:solidFill>
+                <a:latin typeface="微软雅黑"/>
+                <a:ea typeface="微软雅黑"/>
+                <a:cs typeface="微软雅黑"/>
+              </a:rPr>
+              <a:t>+ SQLAlchemy + ChromaDB </a:t>
+            </a:r>
+            <a:r>
+              <a:rPr lang="zh-CN" altLang="en-US" sz="1150" b="1" i="0">
+                <a:solidFill>
+                  <a:srgbClr val="2B2F38"/>
+                </a:solidFill>
+                <a:latin typeface="微软雅黑"/>
+                <a:ea typeface="微软雅黑"/>
+                <a:cs typeface="微软雅黑"/>
+              </a:rPr>
+              <a:t>嵌入式 </a:t>
+            </a:r>
+            <a:r>
+              <a:rPr lang="en-US" altLang="zh-CN" sz="1150" b="1" i="0">
+                <a:solidFill>
+                  <a:srgbClr val="2B2F38"/>
+                </a:solidFill>
+                <a:latin typeface="微软雅黑"/>
+                <a:ea typeface="微软雅黑"/>
+                <a:cs typeface="微软雅黑"/>
+              </a:rPr>
+              <a:t>+ </a:t>
+            </a:r>
+            <a:r>
+              <a:rPr lang="zh-CN" altLang="en-US" sz="1150" b="1" i="0">
+                <a:solidFill>
+                  <a:srgbClr val="2B2F38"/>
+                </a:solidFill>
+                <a:latin typeface="微软雅黑"/>
+                <a:ea typeface="微软雅黑"/>
+                <a:cs typeface="微软雅黑"/>
+              </a:rPr>
+              <a:t>文件系统</a:t>
+            </a:r>
+          </a:p>
+          <a:p>
+            <a:pPr algn="l"/>
+            <a:r>
+              <a:rPr lang="en-US" altLang="zh-CN" sz="1150" b="1" i="0">
+                <a:solidFill>
+                  <a:srgbClr val="2B2F38"/>
+                </a:solidFill>
+                <a:latin typeface="微软雅黑"/>
+                <a:ea typeface="微软雅黑"/>
+                <a:cs typeface="微软雅黑"/>
+              </a:rPr>
+              <a:t>MySQL </a:t>
+            </a:r>
+            <a:r>
+              <a:rPr lang="zh-CN" altLang="en-US" sz="1150" b="1" i="0">
+                <a:solidFill>
+                  <a:srgbClr val="2B2F38"/>
+                </a:solidFill>
+                <a:latin typeface="微软雅黑"/>
+                <a:ea typeface="微软雅黑"/>
+                <a:cs typeface="微软雅黑"/>
+              </a:rPr>
+              <a:t>为可选部署路径（已做方言对齐与迁移准备，非默认、未启用）</a:t>
+            </a:r>
+            <a:endParaRPr sz="1150" b="1" i="0">
+              <a:solidFill>
+                <a:srgbClr val="2B2F38"/>
+              </a:solidFill>
+              <a:latin typeface="微软雅黑"/>
+              <a:ea typeface="微软雅黑"/>
+              <a:cs typeface="微软雅黑"/>
+            </a:endParaRPr>
           </a:p>
         </p:txBody>
       </p:sp>
@@ -19386,7 +21822,7 @@
         <p:spPr>
           <a:xfrm>
             <a:off x="960120" y="5715000"/>
-            <a:ext cx="7589520" cy="274320"/>
+            <a:ext cx="7589520" cy="161583"/>
           </a:xfrm>
           <a:prstGeom prst="rect">
             <a:avLst/>
@@ -19401,7 +21837,7 @@
           <a:p>
             <a:pPr algn="l"/>
             <a:r>
-              <a:rPr sz="1050" b="0" i="0">
+              <a:rPr lang="zh-CN" altLang="en-US" sz="1050" b="0" i="0">
                 <a:solidFill>
                   <a:srgbClr val="667085"/>
                 </a:solidFill>
@@ -19409,8 +21845,60 @@
                 <a:ea typeface="微软雅黑"/>
                 <a:cs typeface="微软雅黑"/>
               </a:rPr>
-              <a:t>结构化业务数据 · 向量知识库 · 合同原件与 PDF 副本</a:t>
-            </a:r>
+              <a:t>结构化业务数据（</a:t>
+            </a:r>
+            <a:r>
+              <a:rPr lang="en-US" sz="1050" b="0" i="0">
+                <a:solidFill>
+                  <a:srgbClr val="667085"/>
+                </a:solidFill>
+                <a:latin typeface="微软雅黑"/>
+                <a:ea typeface="微软雅黑"/>
+                <a:cs typeface="微软雅黑"/>
+              </a:rPr>
+              <a:t>backend/contract.db）· </a:t>
+            </a:r>
+            <a:r>
+              <a:rPr lang="zh-CN" altLang="en-US" sz="1050" b="0" i="0">
+                <a:solidFill>
+                  <a:srgbClr val="667085"/>
+                </a:solidFill>
+                <a:latin typeface="微软雅黑"/>
+                <a:ea typeface="微软雅黑"/>
+                <a:cs typeface="微软雅黑"/>
+              </a:rPr>
+              <a:t>向量知识库（</a:t>
+            </a:r>
+            <a:r>
+              <a:rPr lang="en-US" sz="1050" b="0" i="0">
+                <a:solidFill>
+                  <a:srgbClr val="667085"/>
+                </a:solidFill>
+                <a:latin typeface="微软雅黑"/>
+                <a:ea typeface="微软雅黑"/>
+                <a:cs typeface="微软雅黑"/>
+              </a:rPr>
+              <a:t>backend/chroma_data）· </a:t>
+            </a:r>
+            <a:r>
+              <a:rPr lang="zh-CN" altLang="en-US" sz="1050" b="0" i="0">
+                <a:solidFill>
+                  <a:srgbClr val="667085"/>
+                </a:solidFill>
+                <a:latin typeface="微软雅黑"/>
+                <a:ea typeface="微软雅黑"/>
+                <a:cs typeface="微软雅黑"/>
+              </a:rPr>
+              <a:t>合同原件与软删除归档</a:t>
+            </a:r>
+            <a:endParaRPr sz="1050" b="0" i="0">
+              <a:solidFill>
+                <a:srgbClr val="667085"/>
+              </a:solidFill>
+              <a:latin typeface="微软雅黑"/>
+              <a:ea typeface="微软雅黑"/>
+              <a:cs typeface="微软雅黑"/>
+            </a:endParaRPr>
           </a:p>
         </p:txBody>
       </p:sp>
@@ -19621,7 +22109,7 @@
                 <a:ea typeface="微软雅黑"/>
                 <a:cs typeface="微软雅黑"/>
               </a:rPr>
-              <a:t>SmartContract Auditor · 海底汪汪队</a:t>
+              <a:t>SmartContract Auditor · 海底喵喵队</a:t>
             </a:r>
           </a:p>
         </p:txBody>
@@ -21329,7 +23817,7 @@
                 <a:ea typeface="微软雅黑"/>
                 <a:cs typeface="微软雅黑"/>
               </a:rPr>
-              <a:t>SmartContract Auditor · 海底汪汪队</a:t>
+              <a:t>SmartContract Auditor · 海底喵喵队</a:t>
             </a:r>
           </a:p>
         </p:txBody>
@@ -22509,7 +24997,7 @@
                 <a:ea typeface="微软雅黑"/>
                 <a:cs typeface="微软雅黑"/>
               </a:rPr>
-              <a:t>SmartContract Auditor · 海底汪汪队</a:t>
+              <a:t>SmartContract Auditor · 海底喵喵队</a:t>
             </a:r>
           </a:p>
         </p:txBody>
@@ -22686,8 +25174,8 @@
         </p:nvSpPr>
         <p:spPr>
           <a:xfrm>
-            <a:off x="1170432" y="329184"/>
-            <a:ext cx="8778240" cy="594360"/>
+            <a:off x="1170432" y="418615"/>
+            <a:ext cx="8778240" cy="415498"/>
           </a:xfrm>
           <a:prstGeom prst="rect">
             <a:avLst/>
@@ -22702,7 +25190,7 @@
           <a:p>
             <a:pPr algn="l"/>
             <a:r>
-              <a:rPr sz="2700" b="1" i="0">
+              <a:rPr lang="zh-CN" altLang="en-US" sz="2700" b="1" i="0">
                 <a:solidFill>
                   <a:srgbClr val="1935C3"/>
                 </a:solidFill>
@@ -22710,8 +25198,49 @@
                 <a:ea typeface="微软雅黑"/>
                 <a:cs typeface="微软雅黑"/>
               </a:rPr>
-              <a:t>用数据说话：从 24% 到 76.6% 的精准率跃迁</a:t>
-            </a:r>
+              <a:t>用数据说话：精准率 </a:t>
+            </a:r>
+            <a:r>
+              <a:rPr lang="en-US" altLang="zh-CN" sz="2700" b="1" i="0">
+                <a:solidFill>
+                  <a:srgbClr val="1935C3"/>
+                </a:solidFill>
+                <a:latin typeface="微软雅黑"/>
+                <a:ea typeface="微软雅黑"/>
+                <a:cs typeface="微软雅黑"/>
+              </a:rPr>
+              <a:t>24% → 76.6%</a:t>
+            </a:r>
+            <a:r>
+              <a:rPr lang="zh-CN" altLang="en-US" sz="2700" b="1" i="0">
+                <a:solidFill>
+                  <a:srgbClr val="1935C3"/>
+                </a:solidFill>
+                <a:latin typeface="微软雅黑"/>
+                <a:ea typeface="微软雅黑"/>
+                <a:cs typeface="微软雅黑"/>
+              </a:rPr>
+              <a:t>，召回率守住 </a:t>
+            </a:r>
+            <a:r>
+              <a:rPr lang="en-US" altLang="zh-CN" sz="2700" b="1" i="0">
+                <a:solidFill>
+                  <a:srgbClr val="1935C3"/>
+                </a:solidFill>
+                <a:latin typeface="微软雅黑"/>
+                <a:ea typeface="微软雅黑"/>
+                <a:cs typeface="微软雅黑"/>
+              </a:rPr>
+              <a:t>80.1%</a:t>
+            </a:r>
+            <a:endParaRPr sz="2700" b="1" i="0">
+              <a:solidFill>
+                <a:srgbClr val="1935C3"/>
+              </a:solidFill>
+              <a:latin typeface="微软雅黑"/>
+              <a:ea typeface="微软雅黑"/>
+              <a:cs typeface="微软雅黑"/>
+            </a:endParaRPr>
           </a:p>
         </p:txBody>
       </p:sp>
@@ -22776,7 +25305,7 @@
           <a:p>
             <a:pPr algn="l"/>
             <a:r>
-              <a:rPr sz="1450" b="0" i="0">
+              <a:rPr lang="zh-CN" altLang="en-US" sz="1450" b="0" i="0">
                 <a:solidFill>
                   <a:srgbClr val="2B2F38"/>
                 </a:solidFill>
@@ -22784,8 +25313,82 @@
                 <a:ea typeface="微软雅黑"/>
                 <a:cs typeface="微软雅黑"/>
               </a:rPr>
-              <a:t>风险引擎经过多轮对照实验迭代，每一步都由真实测试集的精准率/召回率数据驱动</a:t>
-            </a:r>
+              <a:t>风险引擎经过多轮对照实验迭代，每一步都由真实测试集（</a:t>
+            </a:r>
+            <a:r>
+              <a:rPr lang="en-US" altLang="zh-CN" sz="1450" b="0" i="0">
+                <a:solidFill>
+                  <a:srgbClr val="2B2F38"/>
+                </a:solidFill>
+                <a:latin typeface="微软雅黑"/>
+                <a:ea typeface="微软雅黑"/>
+                <a:cs typeface="微软雅黑"/>
+              </a:rPr>
+              <a:t>84 </a:t>
+            </a:r>
+            <a:r>
+              <a:rPr lang="zh-CN" altLang="en-US" sz="1450" b="0" i="0">
+                <a:solidFill>
+                  <a:srgbClr val="2B2F38"/>
+                </a:solidFill>
+                <a:latin typeface="微软雅黑"/>
+                <a:ea typeface="微软雅黑"/>
+                <a:cs typeface="微软雅黑"/>
+              </a:rPr>
+              <a:t>份 </a:t>
+            </a:r>
+            <a:r>
+              <a:rPr lang="en-US" altLang="zh-CN" sz="1450" b="0" i="0">
+                <a:solidFill>
+                  <a:srgbClr val="2B2F38"/>
+                </a:solidFill>
+                <a:latin typeface="微软雅黑"/>
+                <a:ea typeface="微软雅黑"/>
+                <a:cs typeface="微软雅黑"/>
+              </a:rPr>
+              <a:t>/ 152 </a:t>
+            </a:r>
+            <a:r>
+              <a:rPr lang="zh-CN" altLang="en-US" sz="1450" b="0" i="0">
+                <a:solidFill>
+                  <a:srgbClr val="2B2F38"/>
+                </a:solidFill>
+                <a:latin typeface="微软雅黑"/>
+                <a:ea typeface="微软雅黑"/>
+                <a:cs typeface="微软雅黑"/>
+              </a:rPr>
+              <a:t>条标注）的精准率、召回率与 </a:t>
+            </a:r>
+            <a:r>
+              <a:rPr lang="en-US" altLang="zh-CN" sz="1450" b="0" i="0">
+                <a:solidFill>
+                  <a:srgbClr val="2B2F38"/>
+                </a:solidFill>
+                <a:latin typeface="微软雅黑"/>
+                <a:ea typeface="微软雅黑"/>
+                <a:cs typeface="微软雅黑"/>
+              </a:rPr>
+              <a:t>F1 </a:t>
+            </a:r>
+            <a:r>
+              <a:rPr lang="zh-CN" altLang="en-US" sz="1450" b="0" i="0">
+                <a:solidFill>
+                  <a:srgbClr val="2B2F38"/>
+                </a:solidFill>
+                <a:latin typeface="微软雅黑"/>
+                <a:ea typeface="微软雅黑"/>
+                <a:cs typeface="微软雅黑"/>
+              </a:rPr>
+              <a:t>数据驱动；下表为冻结口径，不作美化</a:t>
+            </a:r>
+            <a:endParaRPr sz="1450" b="0" i="0">
+              <a:solidFill>
+                <a:srgbClr val="2B2F38"/>
+              </a:solidFill>
+              <a:latin typeface="微软雅黑"/>
+              <a:ea typeface="微软雅黑"/>
+              <a:cs typeface="微软雅黑"/>
+            </a:endParaRPr>
           </a:p>
         </p:txBody>
       </p:sp>
@@ -22989,7 +25592,7 @@
         <p:spPr>
           <a:xfrm>
             <a:off x="868680" y="4114800"/>
-            <a:ext cx="3154680" cy="548640"/>
+            <a:ext cx="3154680" cy="326756"/>
           </a:xfrm>
           <a:prstGeom prst="rect">
             <a:avLst/>
@@ -23008,7 +25611,7 @@
               </a:lnSpc>
             </a:pPr>
             <a:r>
-              <a:rPr sz="1000" b="0" i="0">
+              <a:rPr lang="zh-CN" altLang="en-US" sz="1000" b="0" i="0">
                 <a:solidFill>
                   <a:srgbClr val="667085"/>
                 </a:solidFill>
@@ -23016,8 +25619,82 @@
                 <a:ea typeface="微软雅黑"/>
                 <a:cs typeface="微软雅黑"/>
               </a:rPr>
-              <a:t>过报 466 条，精准率惨不忍睹</a:t>
-            </a:r>
+              <a:t>过报 </a:t>
+            </a:r>
+            <a:r>
+              <a:rPr lang="en-US" altLang="zh-CN" sz="1000" b="0" i="0">
+                <a:solidFill>
+                  <a:srgbClr val="667085"/>
+                </a:solidFill>
+                <a:latin typeface="微软雅黑"/>
+                <a:ea typeface="微软雅黑"/>
+                <a:cs typeface="微软雅黑"/>
+              </a:rPr>
+              <a:t>466 </a:t>
+            </a:r>
+            <a:r>
+              <a:rPr lang="zh-CN" altLang="en-US" sz="1000" b="0" i="0">
+                <a:solidFill>
+                  <a:srgbClr val="667085"/>
+                </a:solidFill>
+                <a:latin typeface="微软雅黑"/>
+                <a:ea typeface="微软雅黑"/>
+                <a:cs typeface="微软雅黑"/>
+              </a:rPr>
+              <a:t>条：精准率仅 </a:t>
+            </a:r>
+            <a:r>
+              <a:rPr lang="en-US" altLang="zh-CN" sz="1000" b="0" i="0">
+                <a:solidFill>
+                  <a:srgbClr val="667085"/>
+                </a:solidFill>
+                <a:latin typeface="微软雅黑"/>
+                <a:ea typeface="微软雅黑"/>
+                <a:cs typeface="微软雅黑"/>
+              </a:rPr>
+              <a:t>24.0%</a:t>
+            </a:r>
+            <a:r>
+              <a:rPr lang="zh-CN" altLang="en-US" sz="1000" b="0" i="0">
+                <a:solidFill>
+                  <a:srgbClr val="667085"/>
+                </a:solidFill>
+                <a:latin typeface="微软雅黑"/>
+                <a:ea typeface="微软雅黑"/>
+                <a:cs typeface="微软雅黑"/>
+              </a:rPr>
+              <a:t>，但召回虚高 </a:t>
+            </a:r>
+            <a:r>
+              <a:rPr lang="en-US" altLang="zh-CN" sz="1000" b="0" i="0">
+                <a:solidFill>
+                  <a:srgbClr val="667085"/>
+                </a:solidFill>
+                <a:latin typeface="微软雅黑"/>
+                <a:ea typeface="微软雅黑"/>
+                <a:cs typeface="微软雅黑"/>
+              </a:rPr>
+              <a:t>97.4%</a:t>
+            </a:r>
+            <a:r>
+              <a:rPr lang="zh-CN" altLang="en-US" sz="1000" b="0" i="0">
+                <a:solidFill>
+                  <a:srgbClr val="667085"/>
+                </a:solidFill>
+                <a:latin typeface="微软雅黑"/>
+                <a:ea typeface="微软雅黑"/>
+                <a:cs typeface="微软雅黑"/>
+              </a:rPr>
+              <a:t>（关键词式泛判，结论不可用）</a:t>
+            </a:r>
+            <a:endParaRPr sz="1000" b="0" i="0">
+              <a:solidFill>
+                <a:srgbClr val="667085"/>
+              </a:solidFill>
+              <a:latin typeface="微软雅黑"/>
+              <a:ea typeface="微软雅黑"/>
+              <a:cs typeface="微软雅黑"/>
+            </a:endParaRPr>
           </a:p>
         </p:txBody>
       </p:sp>
@@ -23221,7 +25898,7 @@
         <p:spPr>
           <a:xfrm>
             <a:off x="4663440" y="4114800"/>
-            <a:ext cx="3154680" cy="548640"/>
+            <a:ext cx="3154680" cy="326756"/>
           </a:xfrm>
           <a:prstGeom prst="rect">
             <a:avLst/>
@@ -23240,7 +25917,7 @@
               </a:lnSpc>
             </a:pPr>
             <a:r>
-              <a:rPr sz="1000" b="0" i="0">
+              <a:rPr lang="zh-CN" altLang="en-US" sz="1000" b="0" i="0">
                 <a:solidFill>
                   <a:srgbClr val="667085"/>
                 </a:solidFill>
@@ -23248,8 +25925,49 @@
                 <a:ea typeface="微软雅黑"/>
                 <a:cs typeface="微软雅黑"/>
               </a:rPr>
-              <a:t>召回率反被“误杀”到 73.5%</a:t>
-            </a:r>
+              <a:t>阈值写进提示词：召回率反被误杀到 </a:t>
+            </a:r>
+            <a:r>
+              <a:rPr lang="en-US" altLang="zh-CN" sz="1000" b="0" i="0">
+                <a:solidFill>
+                  <a:srgbClr val="667085"/>
+                </a:solidFill>
+                <a:latin typeface="微软雅黑"/>
+                <a:ea typeface="微软雅黑"/>
+                <a:cs typeface="微软雅黑"/>
+              </a:rPr>
+              <a:t>73.5%</a:t>
+            </a:r>
+            <a:r>
+              <a:rPr lang="zh-CN" altLang="en-US" sz="1000" b="0" i="0">
+                <a:solidFill>
+                  <a:srgbClr val="667085"/>
+                </a:solidFill>
+                <a:latin typeface="微软雅黑"/>
+                <a:ea typeface="微软雅黑"/>
+                <a:cs typeface="微软雅黑"/>
+              </a:rPr>
+              <a:t>，精准率仅 </a:t>
+            </a:r>
+            <a:r>
+              <a:rPr lang="en-US" altLang="zh-CN" sz="1000" b="0" i="0">
+                <a:solidFill>
+                  <a:srgbClr val="667085"/>
+                </a:solidFill>
+                <a:latin typeface="微软雅黑"/>
+                <a:ea typeface="微软雅黑"/>
+                <a:cs typeface="微软雅黑"/>
+              </a:rPr>
+              <a:t>25.9%</a:t>
+            </a:r>
+            <a:endParaRPr sz="1000" b="0" i="0">
+              <a:solidFill>
+                <a:srgbClr val="667085"/>
+              </a:solidFill>
+              <a:latin typeface="微软雅黑"/>
+              <a:ea typeface="微软雅黑"/>
+              <a:cs typeface="微软雅黑"/>
+            </a:endParaRPr>
           </a:p>
         </p:txBody>
       </p:sp>
@@ -23501,7 +26219,7 @@
         <p:spPr>
           <a:xfrm>
             <a:off x="8458200" y="4114800"/>
-            <a:ext cx="3154680" cy="548640"/>
+            <a:ext cx="3154680" cy="326756"/>
           </a:xfrm>
           <a:prstGeom prst="rect">
             <a:avLst/>
@@ -23520,7 +26238,7 @@
               </a:lnSpc>
             </a:pPr>
             <a:r>
-              <a:rPr sz="1000" b="0" i="0">
+              <a:rPr lang="zh-CN" altLang="en-US" sz="1000" b="0" i="0">
                 <a:solidFill>
                   <a:srgbClr val="DDE4F7"/>
                 </a:solidFill>
@@ -23528,8 +26246,104 @@
                 <a:ea typeface="微软雅黑"/>
                 <a:cs typeface="微软雅黑"/>
               </a:rPr>
-              <a:t>精准率×3，召回率守住 80%</a:t>
-            </a:r>
+              <a:t>精准率</a:t>
+            </a:r>
+            <a:r>
+              <a:rPr lang="en-US" altLang="zh-CN" sz="1000" b="0" i="0">
+                <a:solidFill>
+                  <a:srgbClr val="DDE4F7"/>
+                </a:solidFill>
+                <a:latin typeface="微软雅黑"/>
+                <a:ea typeface="微软雅黑"/>
+                <a:cs typeface="微软雅黑"/>
+              </a:rPr>
+              <a:t>×3</a:t>
+            </a:r>
+            <a:r>
+              <a:rPr lang="zh-CN" altLang="en-US" sz="1000" b="0" i="0">
+                <a:solidFill>
+                  <a:srgbClr val="DDE4F7"/>
+                </a:solidFill>
+                <a:latin typeface="微软雅黑"/>
+                <a:ea typeface="微软雅黑"/>
+                <a:cs typeface="微软雅黑"/>
+              </a:rPr>
+              <a:t>；召回率较 </a:t>
+            </a:r>
+            <a:r>
+              <a:rPr lang="en-US" altLang="zh-CN" sz="1000" b="0" i="0">
+                <a:solidFill>
+                  <a:srgbClr val="DDE4F7"/>
+                </a:solidFill>
+                <a:latin typeface="微软雅黑"/>
+                <a:ea typeface="微软雅黑"/>
+                <a:cs typeface="微软雅黑"/>
+              </a:rPr>
+              <a:t>v4 </a:t>
+            </a:r>
+            <a:r>
+              <a:rPr lang="zh-CN" altLang="en-US" sz="1000" b="0" i="0">
+                <a:solidFill>
+                  <a:srgbClr val="DDE4F7"/>
+                </a:solidFill>
+                <a:latin typeface="微软雅黑"/>
+                <a:ea typeface="微软雅黑"/>
+                <a:cs typeface="微软雅黑"/>
+              </a:rPr>
+              <a:t>的虚高值回落属预期取舍，仍守住 </a:t>
+            </a:r>
+            <a:r>
+              <a:rPr lang="en-US" altLang="zh-CN" sz="1000" b="0" i="0">
+                <a:solidFill>
+                  <a:srgbClr val="DDE4F7"/>
+                </a:solidFill>
+                <a:latin typeface="微软雅黑"/>
+                <a:ea typeface="微软雅黑"/>
+                <a:cs typeface="微软雅黑"/>
+              </a:rPr>
+              <a:t>80.1%</a:t>
+            </a:r>
+            <a:r>
+              <a:rPr lang="zh-CN" altLang="en-US" sz="1000" b="0" i="0">
+                <a:solidFill>
+                  <a:srgbClr val="DDE4F7"/>
+                </a:solidFill>
+                <a:latin typeface="微软雅黑"/>
+                <a:ea typeface="微软雅黑"/>
+                <a:cs typeface="微软雅黑"/>
+              </a:rPr>
+              <a:t>（≥</a:t>
+            </a:r>
+            <a:r>
+              <a:rPr lang="en-US" altLang="zh-CN" sz="1000" b="0" i="0">
+                <a:solidFill>
+                  <a:srgbClr val="DDE4F7"/>
+                </a:solidFill>
+                <a:latin typeface="微软雅黑"/>
+                <a:ea typeface="微软雅黑"/>
+                <a:cs typeface="微软雅黑"/>
+              </a:rPr>
+              <a:t>75% </a:t>
+            </a:r>
+            <a:r>
+              <a:rPr lang="zh-CN" altLang="en-US" sz="1000" b="0" i="0">
+                <a:solidFill>
+                  <a:srgbClr val="DDE4F7"/>
+                </a:solidFill>
+                <a:latin typeface="微软雅黑"/>
+                <a:ea typeface="微软雅黑"/>
+                <a:cs typeface="微软雅黑"/>
+              </a:rPr>
+              <a:t>门槛）</a:t>
+            </a:r>
+            <a:endParaRPr sz="1000" b="0" i="0">
+              <a:solidFill>
+                <a:srgbClr val="DDE4F7"/>
+              </a:solidFill>
+              <a:latin typeface="微软雅黑"/>
+              <a:ea typeface="微软雅黑"/>
+              <a:cs typeface="微软雅黑"/>
+            </a:endParaRPr>
           </a:p>
         </p:txBody>
       </p:sp>
@@ -23542,7 +26356,7 @@
         <p:spPr>
           <a:xfrm>
             <a:off x="640080" y="5120640"/>
-            <a:ext cx="10972800" cy="822960"/>
+            <a:ext cx="10972800" cy="1000274"/>
           </a:xfrm>
           <a:prstGeom prst="rect">
             <a:avLst/>
@@ -23561,7 +26375,7 @@
               </a:spcAft>
             </a:pPr>
             <a:r>
-              <a:rPr sz="1500" b="1" i="0">
+              <a:rPr lang="zh-CN" altLang="en-US" sz="1500" b="1" i="0">
                 <a:solidFill>
                   <a:srgbClr val="E60012"/>
                 </a:solidFill>
@@ -23574,21 +26388,410 @@
           </a:p>
           <a:p>
             <a:pPr algn="l">
-              <a:lnSpc>
-                <a:spcPct val="125000"/>
-              </a:lnSpc>
+              <a:spcAft>
+                <a:spcPts val="300"/>
+              </a:spcAft>
             </a:pPr>
             <a:r>
-              <a:rPr sz="1400" b="0" i="0">
-                <a:solidFill>
-                  <a:srgbClr val="2B2F38"/>
-                </a:solidFill>
-                <a:latin typeface="微软雅黑"/>
-                <a:ea typeface="微软雅黑"/>
-                <a:cs typeface="微软雅黑"/>
-              </a:rPr>
-              <a:t>LLM 擅长布尔/数值判断，复杂枚举/嵌套规则应交给代码裁决。这正是「证据-裁决解耦」架构的由来——把裁决权收回代码后，精准率从 24% 拉到 76.6%，同时召回率守住 80.1%。</a:t>
-            </a:r>
+              <a:rPr lang="en-US" altLang="zh-CN" sz="1500" b="1" i="0">
+                <a:solidFill>
+                  <a:srgbClr val="E60012"/>
+                </a:solidFill>
+                <a:latin typeface="微软雅黑"/>
+                <a:ea typeface="微软雅黑"/>
+                <a:cs typeface="微软雅黑"/>
+              </a:rPr>
+              <a:t>LLM </a:t>
+            </a:r>
+            <a:r>
+              <a:rPr lang="zh-CN" altLang="en-US" sz="1500" b="1" i="0">
+                <a:solidFill>
+                  <a:srgbClr val="E60012"/>
+                </a:solidFill>
+                <a:latin typeface="微软雅黑"/>
+                <a:ea typeface="微软雅黑"/>
+                <a:cs typeface="微软雅黑"/>
+              </a:rPr>
+              <a:t>擅长布尔</a:t>
+            </a:r>
+            <a:r>
+              <a:rPr lang="en-US" altLang="zh-CN" sz="1500" b="1" i="0">
+                <a:solidFill>
+                  <a:srgbClr val="E60012"/>
+                </a:solidFill>
+                <a:latin typeface="微软雅黑"/>
+                <a:ea typeface="微软雅黑"/>
+                <a:cs typeface="微软雅黑"/>
+              </a:rPr>
+              <a:t>/</a:t>
+            </a:r>
+            <a:r>
+              <a:rPr lang="zh-CN" altLang="en-US" sz="1500" b="1" i="0">
+                <a:solidFill>
+                  <a:srgbClr val="E60012"/>
+                </a:solidFill>
+                <a:latin typeface="微软雅黑"/>
+                <a:ea typeface="微软雅黑"/>
+                <a:cs typeface="微软雅黑"/>
+              </a:rPr>
+              <a:t>数值判断，复杂枚举</a:t>
+            </a:r>
+            <a:r>
+              <a:rPr lang="en-US" altLang="zh-CN" sz="1500" b="1" i="0">
+                <a:solidFill>
+                  <a:srgbClr val="E60012"/>
+                </a:solidFill>
+                <a:latin typeface="微软雅黑"/>
+                <a:ea typeface="微软雅黑"/>
+                <a:cs typeface="微软雅黑"/>
+              </a:rPr>
+              <a:t>/</a:t>
+            </a:r>
+            <a:r>
+              <a:rPr lang="zh-CN" altLang="en-US" sz="1500" b="1" i="0">
+                <a:solidFill>
+                  <a:srgbClr val="E60012"/>
+                </a:solidFill>
+                <a:latin typeface="微软雅黑"/>
+                <a:ea typeface="微软雅黑"/>
+                <a:cs typeface="微软雅黑"/>
+              </a:rPr>
+              <a:t>嵌套规则应交给代码裁决。这正是「证据</a:t>
+            </a:r>
+            <a:r>
+              <a:rPr lang="en-US" altLang="zh-CN" sz="1500" b="1" i="0">
+                <a:solidFill>
+                  <a:srgbClr val="E60012"/>
+                </a:solidFill>
+                <a:latin typeface="微软雅黑"/>
+                <a:ea typeface="微软雅黑"/>
+                <a:cs typeface="微软雅黑"/>
+              </a:rPr>
+              <a:t>-</a:t>
+            </a:r>
+            <a:r>
+              <a:rPr lang="zh-CN" altLang="en-US" sz="1500" b="1" i="0">
+                <a:solidFill>
+                  <a:srgbClr val="E60012"/>
+                </a:solidFill>
+                <a:latin typeface="微软雅黑"/>
+                <a:ea typeface="微软雅黑"/>
+                <a:cs typeface="微软雅黑"/>
+              </a:rPr>
+              <a:t>裁决解耦」架构的由来</a:t>
+            </a:r>
+            <a:r>
+              <a:rPr lang="en-US" altLang="zh-CN" sz="1500" b="1" i="0">
+                <a:solidFill>
+                  <a:srgbClr val="E60012"/>
+                </a:solidFill>
+                <a:latin typeface="微软雅黑"/>
+                <a:ea typeface="微软雅黑"/>
+                <a:cs typeface="微软雅黑"/>
+              </a:rPr>
+              <a:t>——</a:t>
+            </a:r>
+            <a:r>
+              <a:rPr lang="zh-CN" altLang="en-US" sz="1500" b="1" i="0">
+                <a:solidFill>
+                  <a:srgbClr val="E60012"/>
+                </a:solidFill>
+                <a:latin typeface="微软雅黑"/>
+                <a:ea typeface="微软雅黑"/>
+                <a:cs typeface="微软雅黑"/>
+              </a:rPr>
+              <a:t>把裁决权收回代码后，精准率从 </a:t>
+            </a:r>
+            <a:r>
+              <a:rPr lang="en-US" altLang="zh-CN" sz="1500" b="1" i="0">
+                <a:solidFill>
+                  <a:srgbClr val="E60012"/>
+                </a:solidFill>
+                <a:latin typeface="微软雅黑"/>
+                <a:ea typeface="微软雅黑"/>
+                <a:cs typeface="微软雅黑"/>
+              </a:rPr>
+              <a:t>24% </a:t>
+            </a:r>
+            <a:r>
+              <a:rPr lang="zh-CN" altLang="en-US" sz="1500" b="1" i="0">
+                <a:solidFill>
+                  <a:srgbClr val="E60012"/>
+                </a:solidFill>
+                <a:latin typeface="微软雅黑"/>
+                <a:ea typeface="微软雅黑"/>
+                <a:cs typeface="微软雅黑"/>
+              </a:rPr>
+              <a:t>提升到 </a:t>
+            </a:r>
+            <a:r>
+              <a:rPr lang="en-US" altLang="zh-CN" sz="1500" b="1" i="0">
+                <a:solidFill>
+                  <a:srgbClr val="E60012"/>
+                </a:solidFill>
+                <a:latin typeface="微软雅黑"/>
+                <a:ea typeface="微软雅黑"/>
+                <a:cs typeface="微软雅黑"/>
+              </a:rPr>
+              <a:t>76.6%</a:t>
+            </a:r>
+            <a:r>
+              <a:rPr lang="zh-CN" altLang="en-US" sz="1500" b="1" i="0">
+                <a:solidFill>
+                  <a:srgbClr val="E60012"/>
+                </a:solidFill>
+                <a:latin typeface="微软雅黑"/>
+                <a:ea typeface="微软雅黑"/>
+                <a:cs typeface="微软雅黑"/>
+              </a:rPr>
+              <a:t>，召回率 </a:t>
+            </a:r>
+            <a:r>
+              <a:rPr lang="en-US" altLang="zh-CN" sz="1500" b="1" i="0">
+                <a:solidFill>
+                  <a:srgbClr val="E60012"/>
+                </a:solidFill>
+                <a:latin typeface="微软雅黑"/>
+                <a:ea typeface="微软雅黑"/>
+                <a:cs typeface="微软雅黑"/>
+              </a:rPr>
+              <a:t>80.1%</a:t>
+            </a:r>
+            <a:r>
+              <a:rPr lang="zh-CN" altLang="en-US" sz="1500" b="1" i="0">
+                <a:solidFill>
+                  <a:srgbClr val="E60012"/>
+                </a:solidFill>
+                <a:latin typeface="微软雅黑"/>
+                <a:ea typeface="微软雅黑"/>
+                <a:cs typeface="微软雅黑"/>
+              </a:rPr>
+              <a:t>，</a:t>
+            </a:r>
+            <a:r>
+              <a:rPr lang="en-US" altLang="zh-CN" sz="1500" b="1" i="0">
+                <a:solidFill>
+                  <a:srgbClr val="E60012"/>
+                </a:solidFill>
+                <a:latin typeface="微软雅黑"/>
+                <a:ea typeface="微软雅黑"/>
+                <a:cs typeface="微软雅黑"/>
+              </a:rPr>
+              <a:t>F1 78.3%</a:t>
+            </a:r>
+            <a:r>
+              <a:rPr lang="zh-CN" altLang="en-US" sz="1500" b="1" i="0">
+                <a:solidFill>
+                  <a:srgbClr val="E60012"/>
+                </a:solidFill>
+                <a:latin typeface="微软雅黑"/>
+                <a:ea typeface="微软雅黑"/>
+                <a:cs typeface="微软雅黑"/>
+              </a:rPr>
+              <a:t>。</a:t>
+            </a:r>
+          </a:p>
+          <a:p>
+            <a:pPr algn="l">
+              <a:spcAft>
+                <a:spcPts val="300"/>
+              </a:spcAft>
+            </a:pPr>
+            <a:r>
+              <a:rPr lang="zh-CN" altLang="en-US" sz="1500" b="1" i="0">
+                <a:solidFill>
+                  <a:srgbClr val="E60012"/>
+                </a:solidFill>
+                <a:latin typeface="微软雅黑"/>
+                <a:ea typeface="微软雅黑"/>
+                <a:cs typeface="微软雅黑"/>
+              </a:rPr>
+              <a:t>口径边界：风险 </a:t>
+            </a:r>
+            <a:r>
+              <a:rPr lang="en-US" altLang="zh-CN" sz="1500" b="1" i="0">
+                <a:solidFill>
+                  <a:srgbClr val="E60012"/>
+                </a:solidFill>
+                <a:latin typeface="微软雅黑"/>
+                <a:ea typeface="微软雅黑"/>
+                <a:cs typeface="微软雅黑"/>
+              </a:rPr>
+              <a:t>P/R/F1 </a:t>
+            </a:r>
+            <a:r>
+              <a:rPr lang="zh-CN" altLang="en-US" sz="1500" b="1" i="0">
+                <a:solidFill>
+                  <a:srgbClr val="E60012"/>
+                </a:solidFill>
+                <a:latin typeface="微软雅黑"/>
+                <a:ea typeface="微软雅黑"/>
+                <a:cs typeface="微软雅黑"/>
+              </a:rPr>
+              <a:t>只覆盖 </a:t>
+            </a:r>
+            <a:r>
+              <a:rPr lang="en-US" altLang="zh-CN" sz="1500" b="1" i="0">
+                <a:solidFill>
+                  <a:srgbClr val="E60012"/>
+                </a:solidFill>
+                <a:latin typeface="微软雅黑"/>
+                <a:ea typeface="微软雅黑"/>
+                <a:cs typeface="微软雅黑"/>
+              </a:rPr>
+              <a:t>R01–R12 </a:t>
+            </a:r>
+            <a:r>
+              <a:rPr lang="zh-CN" altLang="en-US" sz="1500" b="1" i="0">
+                <a:solidFill>
+                  <a:srgbClr val="E60012"/>
+                </a:solidFill>
+                <a:latin typeface="微软雅黑"/>
+                <a:ea typeface="微软雅黑"/>
+                <a:cs typeface="微软雅黑"/>
+              </a:rPr>
+              <a:t>中实际有 </a:t>
+            </a:r>
+            <a:r>
+              <a:rPr lang="en-US" altLang="zh-CN" sz="1500" b="1" i="0">
+                <a:solidFill>
+                  <a:srgbClr val="E60012"/>
+                </a:solidFill>
+                <a:latin typeface="微软雅黑"/>
+                <a:ea typeface="微软雅黑"/>
+                <a:cs typeface="微软雅黑"/>
+              </a:rPr>
+              <a:t>Gold </a:t>
+            </a:r>
+            <a:r>
+              <a:rPr lang="zh-CN" altLang="en-US" sz="1500" b="1" i="0">
+                <a:solidFill>
+                  <a:srgbClr val="E60012"/>
+                </a:solidFill>
+                <a:latin typeface="微软雅黑"/>
+                <a:ea typeface="微软雅黑"/>
+                <a:cs typeface="微软雅黑"/>
+              </a:rPr>
+              <a:t>的风险；</a:t>
+            </a:r>
+            <a:r>
+              <a:rPr lang="en-US" altLang="zh-CN" sz="1500" b="1" i="0">
+                <a:solidFill>
+                  <a:srgbClr val="E60012"/>
+                </a:solidFill>
+                <a:latin typeface="微软雅黑"/>
+                <a:ea typeface="微软雅黑"/>
+                <a:cs typeface="微软雅黑"/>
+              </a:rPr>
+              <a:t>R05 </a:t>
+            </a:r>
+            <a:r>
+              <a:rPr lang="zh-CN" altLang="en-US" sz="1500" b="1" i="0">
+                <a:solidFill>
+                  <a:srgbClr val="E60012"/>
+                </a:solidFill>
+                <a:latin typeface="微软雅黑"/>
+                <a:ea typeface="微软雅黑"/>
+                <a:cs typeface="微软雅黑"/>
+              </a:rPr>
+              <a:t>无 </a:t>
+            </a:r>
+            <a:r>
+              <a:rPr lang="en-US" altLang="zh-CN" sz="1500" b="1" i="0">
+                <a:solidFill>
+                  <a:srgbClr val="E60012"/>
+                </a:solidFill>
+                <a:latin typeface="微软雅黑"/>
+                <a:ea typeface="微软雅黑"/>
+                <a:cs typeface="微软雅黑"/>
+              </a:rPr>
+              <a:t>Gold</a:t>
+            </a:r>
+            <a:r>
+              <a:rPr lang="zh-CN" altLang="en-US" sz="1500" b="1" i="0">
+                <a:solidFill>
+                  <a:srgbClr val="E60012"/>
+                </a:solidFill>
+                <a:latin typeface="微软雅黑"/>
+                <a:ea typeface="微软雅黑"/>
+                <a:cs typeface="微软雅黑"/>
+              </a:rPr>
+              <a:t>、</a:t>
+            </a:r>
+            <a:r>
+              <a:rPr lang="en-US" altLang="zh-CN" sz="1500" b="1" i="0">
+                <a:solidFill>
+                  <a:srgbClr val="E60012"/>
+                </a:solidFill>
+                <a:latin typeface="微软雅黑"/>
+                <a:ea typeface="微软雅黑"/>
+                <a:cs typeface="微软雅黑"/>
+              </a:rPr>
+              <a:t>R13 </a:t>
+            </a:r>
+            <a:r>
+              <a:rPr lang="zh-CN" altLang="en-US" sz="1500" b="1" i="0">
+                <a:solidFill>
+                  <a:srgbClr val="E60012"/>
+                </a:solidFill>
+                <a:latin typeface="微软雅黑"/>
+                <a:ea typeface="微软雅黑"/>
+                <a:cs typeface="微软雅黑"/>
+              </a:rPr>
+              <a:t>不进严格 </a:t>
+            </a:r>
+            <a:r>
+              <a:rPr lang="en-US" altLang="zh-CN" sz="1500" b="1" i="0">
+                <a:solidFill>
+                  <a:srgbClr val="E60012"/>
+                </a:solidFill>
+                <a:latin typeface="微软雅黑"/>
+                <a:ea typeface="微软雅黑"/>
+                <a:cs typeface="微软雅黑"/>
+              </a:rPr>
+              <a:t>F1</a:t>
+            </a:r>
+            <a:r>
+              <a:rPr lang="zh-CN" altLang="en-US" sz="1500" b="1" i="0">
+                <a:solidFill>
+                  <a:srgbClr val="E60012"/>
+                </a:solidFill>
+                <a:latin typeface="微软雅黑"/>
+                <a:ea typeface="微软雅黑"/>
+                <a:cs typeface="微软雅黑"/>
+              </a:rPr>
+              <a:t>；</a:t>
+            </a:r>
+            <a:r>
+              <a:rPr lang="en-US" altLang="zh-CN" sz="1500" b="1" i="0">
+                <a:solidFill>
+                  <a:srgbClr val="E60012"/>
+                </a:solidFill>
+                <a:latin typeface="微软雅黑"/>
+                <a:ea typeface="微软雅黑"/>
+                <a:cs typeface="微软雅黑"/>
+              </a:rPr>
+              <a:t>TP 121 / FP 37 / FN 30</a:t>
+            </a:r>
+            <a:r>
+              <a:rPr lang="zh-CN" altLang="en-US" sz="1500" b="1" i="0">
+                <a:solidFill>
+                  <a:srgbClr val="E60012"/>
+                </a:solidFill>
+                <a:latin typeface="微软雅黑"/>
+                <a:ea typeface="微软雅黑"/>
+                <a:cs typeface="微软雅黑"/>
+              </a:rPr>
+              <a:t>。</a:t>
+            </a:r>
+            <a:endParaRPr sz="1400" b="0" i="0">
+              <a:solidFill>
+                <a:srgbClr val="2B2F38"/>
+              </a:solidFill>
+              <a:latin typeface="微软雅黑"/>
+              <a:ea typeface="微软雅黑"/>
+              <a:cs typeface="微软雅黑"/>
+            </a:endParaRPr>
           </a:p>
         </p:txBody>
       </p:sp>
@@ -23624,7 +26827,7 @@
                 <a:ea typeface="微软雅黑"/>
                 <a:cs typeface="微软雅黑"/>
               </a:rPr>
-              <a:t>SmartContract Auditor · 海底汪汪队</a:t>
+              <a:t>SmartContract Auditor · 海底喵喵队</a:t>
             </a:r>
           </a:p>
         </p:txBody>
@@ -24161,85 +27364,6 @@
       </p:sp>
       <p:sp>
         <p:nvSpPr>
-          <p:cNvPr id="10" name="Rounded Rectangle 9"/>
-          <p:cNvSpPr/>
-          <p:nvPr/>
-        </p:nvSpPr>
-        <p:spPr>
-          <a:xfrm>
-            <a:off x="6263640" y="1188720"/>
-            <a:ext cx="5303520" cy="4572000"/>
-          </a:xfrm>
-          <a:prstGeom prst="roundRect">
-            <a:avLst>
-              <a:gd name="adj" fmla="val 5000"/>
-            </a:avLst>
-          </a:prstGeom>
-          <a:solidFill>
-            <a:srgbClr val="F8FAFF"/>
-          </a:solidFill>
-          <a:ln w="15240">
-            <a:solidFill>
-              <a:srgbClr val="C7D2F0"/>
-            </a:solidFill>
-            <a:prstDash val="dash"/>
-          </a:ln>
-          <a:effectLst/>
-        </p:spPr>
-        <p:style>
-          <a:lnRef idx="1">
-            <a:schemeClr val="accent1"/>
-          </a:lnRef>
-          <a:fillRef idx="3">
-            <a:schemeClr val="accent1"/>
-          </a:fillRef>
-          <a:effectRef idx="2">
-            <a:schemeClr val="accent1"/>
-          </a:effectRef>
-          <a:fontRef idx="minor">
-            <a:schemeClr val="lt1"/>
-          </a:fontRef>
-        </p:style>
-        <p:txBody>
-          <a:bodyPr wrap="square" lIns="109728" tIns="54864" rIns="109728" bIns="54864" rtlCol="0" anchor="ctr"/>
-          <a:lstStyle/>
-          <a:p>
-            <a:pPr algn="ctr">
-              <a:spcAft>
-                <a:spcPts val="300"/>
-              </a:spcAft>
-            </a:pPr>
-            <a:r>
-              <a:rPr sz="1100" b="1" i="0">
-                <a:solidFill>
-                  <a:srgbClr val="1935C3"/>
-                </a:solidFill>
-                <a:latin typeface="微软雅黑"/>
-                <a:ea typeface="微软雅黑"/>
-                <a:cs typeface="微软雅黑"/>
-              </a:rPr>
-              <a:t>截图占位</a:t>
-            </a:r>
-          </a:p>
-          <a:p>
-            <a:pPr algn="ctr"/>
-            <a:r>
-              <a:rPr sz="1000" b="0" i="0">
-                <a:solidFill>
-                  <a:srgbClr val="667085"/>
-                </a:solidFill>
-                <a:latin typeface="微软雅黑"/>
-                <a:ea typeface="微软雅黑"/>
-                <a:cs typeface="微软雅黑"/>
-              </a:rPr>
-              <a:t>合同详情页：要素抽取结果
-（甲方/乙方/金额/期限/争议解决 结构化卡片）</a:t>
-            </a:r>
-          </a:p>
-        </p:txBody>
-      </p:sp>
-      <p:sp>
-        <p:nvSpPr>
           <p:cNvPr id="11" name="TextBox 10"/>
           <p:cNvSpPr txBox="1"/>
           <p:nvPr/>
@@ -24270,7 +27394,7 @@
                 <a:ea typeface="微软雅黑"/>
                 <a:cs typeface="微软雅黑"/>
               </a:rPr>
-              <a:t>SmartContract Auditor · 海底汪汪队</a:t>
+              <a:t>SmartContract Auditor · 海底喵喵队</a:t>
             </a:r>
           </a:p>
         </p:txBody>
@@ -24308,6 +27432,123 @@
                 <a:cs typeface="微软雅黑"/>
               </a:rPr>
               <a:t>9</a:t>
+            </a:r>
+          </a:p>
+        </p:txBody>
+      </p:sp>
+      <p:pic>
+        <p:nvPicPr>
+          <p:cNvPr id="14" name="图片 13">
+            <a:extLst>
+              <a:ext uri="{FF2B5EF4-FFF2-40B4-BE49-F238E27FC236}">
+                <a16:creationId xmlns:a16="http://schemas.microsoft.com/office/drawing/2014/main" id="{1A1292D5-272A-6FF8-E4C4-48AD3CC86A59}"/>
+              </a:ext>
+            </a:extLst>
+          </p:cNvPr>
+          <p:cNvPicPr>
+            <a:picLocks noChangeAspect="1"/>
+          </p:cNvPicPr>
+          <p:nvPr/>
+        </p:nvPicPr>
+        <p:blipFill>
+          <a:blip r:embed="rId3"/>
+          <a:stretch>
+            <a:fillRect/>
+          </a:stretch>
+        </p:blipFill>
+        <p:spPr>
+          <a:xfrm>
+            <a:off x="6350000" y="1270000"/>
+            <a:ext cx="5334000" cy="3238500"/>
+          </a:xfrm>
+          <a:prstGeom prst="rect">
+            <a:avLst/>
+          </a:prstGeom>
+        </p:spPr>
+      </p:pic>
+      <p:sp>
+        <p:nvSpPr>
+          <p:cNvPr id="15" name="文本框 14">
+            <a:extLst>
+              <a:ext uri="{FF2B5EF4-FFF2-40B4-BE49-F238E27FC236}">
+                <a16:creationId xmlns:a16="http://schemas.microsoft.com/office/drawing/2014/main" id="{BE229877-2A74-6A19-BAA5-A7536E19F081}"/>
+              </a:ext>
+            </a:extLst>
+          </p:cNvPr>
+          <p:cNvSpPr txBox="1"/>
+          <p:nvPr/>
+        </p:nvSpPr>
+        <p:spPr>
+          <a:xfrm>
+            <a:off x="6350000" y="5740400"/>
+            <a:ext cx="5334000" cy="384721"/>
+          </a:xfrm>
+          <a:prstGeom prst="rect">
+            <a:avLst/>
+          </a:prstGeom>
+          <a:noFill/>
+        </p:spPr>
+        <p:txBody>
+          <a:bodyPr vert="horz" rtlCol="0">
+            <a:spAutoFit/>
+          </a:bodyPr>
+          <a:lstStyle/>
+          <a:p>
+            <a:r>
+              <a:rPr lang="zh-CN" altLang="en-US" sz="950">
+                <a:solidFill>
+                  <a:srgbClr val="808080"/>
+                </a:solidFill>
+              </a:rPr>
+              <a:t>真实截图：合同详情页 </a:t>
+            </a:r>
+            <a:r>
+              <a:rPr lang="en-US" altLang="zh-CN" sz="950">
+                <a:solidFill>
+                  <a:srgbClr val="808080"/>
+                </a:solidFill>
+              </a:rPr>
+              <a:t>· </a:t>
+            </a:r>
+            <a:r>
+              <a:rPr lang="zh-CN" altLang="en-US" sz="950">
+                <a:solidFill>
+                  <a:srgbClr val="808080"/>
+                </a:solidFill>
+              </a:rPr>
+              <a:t>合同结构化画像与风险规则扫描（风险评分 </a:t>
+            </a:r>
+            <a:r>
+              <a:rPr lang="en-US" altLang="zh-CN" sz="950">
+                <a:solidFill>
+                  <a:srgbClr val="808080"/>
+                </a:solidFill>
+              </a:rPr>
+              <a:t>90</a:t>
+            </a:r>
+            <a:r>
+              <a:rPr lang="zh-CN" altLang="en-US" sz="950">
+                <a:solidFill>
+                  <a:srgbClr val="808080"/>
+                </a:solidFill>
+              </a:rPr>
+              <a:t>，</a:t>
+            </a:r>
+            <a:r>
+              <a:rPr lang="en-US" altLang="zh-CN" sz="950">
+                <a:solidFill>
+                  <a:srgbClr val="808080"/>
+                </a:solidFill>
+              </a:rPr>
+              <a:t>2026-09-19 </a:t>
+            </a:r>
+            <a:r>
+              <a:rPr lang="zh-CN" altLang="en-US" sz="950">
+                <a:solidFill>
+                  <a:srgbClr val="808080"/>
+                </a:solidFill>
+              </a:rPr>
+              <a:t>运行系统实拍）</a:t>
             </a:r>
           </a:p>
         </p:txBody>
